--- a/tutor-time/motivation-comes-second/downloads/Motivation_Comes_Second.pptx
+++ b/tutor-time/motivation-comes-second/downloads/Motivation_Comes_Second.pptx
@@ -6564,7 +6564,7 @@
                 </a:solidFill>
                 <a:latin typeface="Karla"/>
               </a:rPr>
-              <a:t>Hands up. This is most of the room.</a:t>
+              <a:t>Hands up. Usually most of the room.</a:t>
             </a:r>
           </a:p>
         </p:txBody>
@@ -6912,7 +6912,7 @@
                 </a:solidFill>
                 <a:latin typeface="Karla"/>
               </a:rPr>
-              <a:t>That is your evidence, not mine. Five minutes ago most of you did not want to do the thing you have just done some of.</a:t>
+              <a:t>That is your evidence, not mine. Five minutes ago, most of you did not want to start what you have just been doing.</a:t>
             </a:r>
           </a:p>
         </p:txBody>
@@ -9103,7 +9103,7 @@
                 </a:solidFill>
                 <a:latin typeface="Karla"/>
               </a:rPr>
-              <a:t>It is half right, and the wrong half is the half that does harm.</a:t>
+              <a:t>It is half right, and the wrong half does harm.</a:t>
             </a:r>
           </a:p>
         </p:txBody>
@@ -9565,7 +9565,7 @@
                 </a:solidFill>
                 <a:latin typeface="Karla"/>
               </a:rPr>
-              <a:t>The word that saying is really reaching for is started, not busy.</a:t>
+              <a:t>What the saying really means is started, not busy.</a:t>
             </a:r>
           </a:p>
         </p:txBody>
@@ -13381,7 +13381,7 @@
                 </a:solidFill>
                 <a:latin typeface="Karla"/>
               </a:rPr>
-              <a:t>Busy is not the same as full</a:t>
+              <a:t>Busy is not the same as moving forward</a:t>
             </a:r>
           </a:p>
         </p:txBody>
@@ -13659,7 +13659,7 @@
                 </a:solidFill>
                 <a:latin typeface="Libre Caslon Display"/>
               </a:rPr>
-              <a:t>Go and do the five minute version.</a:t>
+              <a:t>Go and do the five-minute version.</a:t>
             </a:r>
           </a:p>
         </p:txBody>
@@ -14943,7 +14943,7 @@
                 </a:solidFill>
                 <a:latin typeface="Karla"/>
               </a:rPr>
-              <a:t>Nothing on the board gets judged. We are looking for a pattern, not a right answer.</a:t>
+              <a:t>Nothing on the board gets judged. We are looking for a pattern.</a:t>
             </a:r>
           </a:p>
         </p:txBody>

--- a/tutor-time/motivation-comes-second/downloads/Motivation_Comes_Second.pptx
+++ b/tutor-time/motivation-comes-second/downloads/Motivation_Comes_Second.pptx
@@ -3206,11 +3206,11 @@
               </a:spcAft>
             </a:pPr>
             <a:r>
-              <a:rPr sz="4400" b="1" i="0">
+              <a:rPr sz="4400" b="0" i="0">
                 <a:solidFill>
                   <a:srgbClr val="3A3320"/>
                 </a:solidFill>
-                <a:latin typeface="Libre Caslon Display"/>
+                <a:latin typeface="Georgia"/>
               </a:rPr>
               <a:t>Motivation Comes Second</a:t>
             </a:r>
@@ -3296,7 +3296,7 @@
                 <a:solidFill>
                   <a:srgbClr val="4A4028"/>
                 </a:solidFill>
-                <a:latin typeface="Karla"/>
+                <a:latin typeface="Calibri"/>
               </a:rPr>
               <a:t>You do not start because you feel like it. You feel like it because you started.</a:t>
             </a:r>
@@ -3338,7 +3338,7 @@
                 <a:solidFill>
                   <a:srgbClr val="4A4028"/>
                 </a:solidFill>
-                <a:latin typeface="Karla"/>
+                <a:latin typeface="Calibri"/>
               </a:rPr>
               <a:t>A procrastination lesson</a:t>
             </a:r>
@@ -3404,7 +3404,7 @@
                 <a:solidFill>
                   <a:srgbClr val="4A4028"/>
                 </a:solidFill>
-                <a:latin typeface="Karla"/>
+                <a:latin typeface="Calibri"/>
               </a:rPr>
               <a:t>The Pastoral Guide</a:t>
             </a:r>
@@ -3446,7 +3446,7 @@
                 <a:solidFill>
                   <a:srgbClr val="4A4028"/>
                 </a:solidFill>
-                <a:latin typeface="Karla"/>
+                <a:latin typeface="Calibri"/>
               </a:rPr>
               <a:t>1 / 20</a:t>
             </a:r>
@@ -3550,97 +3550,9 @@
                 <a:solidFill>
                   <a:srgbClr val="8A6512"/>
                 </a:solidFill>
-                <a:latin typeface="Karla"/>
+                <a:latin typeface="Calibri"/>
               </a:rPr>
               <a:t>NOW THE ROOM DOES THREE</a:t>
-            </a:r>
-          </a:p>
-        </p:txBody>
-      </p:sp>
-      <p:sp>
-        <p:nvSpPr>
-          <p:cNvPr id="4" name="Rounded Rectangle 3"/>
-          <p:cNvSpPr/>
-          <p:nvPr/>
-        </p:nvSpPr>
-        <p:spPr>
-          <a:xfrm>
-            <a:off x="7050024" y="530352"/>
-            <a:ext cx="1408176" cy="347472"/>
-          </a:xfrm>
-          <a:prstGeom prst="roundRect">
-            <a:avLst>
-              <a:gd name="adj" fmla="val 50000"/>
-            </a:avLst>
-          </a:prstGeom>
-          <a:solidFill>
-            <a:srgbClr val="FAF1DE"/>
-          </a:solidFill>
-          <a:ln>
-            <a:noFill/>
-          </a:ln>
-          <a:effectLst/>
-        </p:spPr>
-        <p:style>
-          <a:lnRef idx="1">
-            <a:schemeClr val="accent1"/>
-          </a:lnRef>
-          <a:fillRef idx="3">
-            <a:schemeClr val="accent1"/>
-          </a:fillRef>
-          <a:effectRef idx="2">
-            <a:schemeClr val="accent1"/>
-          </a:effectRef>
-          <a:fontRef idx="minor">
-            <a:schemeClr val="lt1"/>
-          </a:fontRef>
-        </p:style>
-        <p:txBody>
-          <a:bodyPr rtlCol="0" anchor="ctr"/>
-          <a:lstStyle/>
-          <a:p>
-            <a:pPr algn="ctr"/>
-          </a:p>
-        </p:txBody>
-      </p:sp>
-      <p:sp>
-        <p:nvSpPr>
-          <p:cNvPr id="5" name="TextBox 4"/>
-          <p:cNvSpPr txBox="1"/>
-          <p:nvPr/>
-        </p:nvSpPr>
-        <p:spPr>
-          <a:xfrm>
-            <a:off x="7050024" y="589788"/>
-            <a:ext cx="1408176" cy="237744"/>
-          </a:xfrm>
-          <a:prstGeom prst="rect">
-            <a:avLst/>
-          </a:prstGeom>
-          <a:noFill/>
-        </p:spPr>
-        <p:txBody>
-          <a:bodyPr wrap="square" lIns="0" rIns="0" tIns="0" bIns="0" anchor="t">
-            <a:spAutoFit/>
-          </a:bodyPr>
-          <a:lstStyle/>
-          <a:p>
-            <a:pPr algn="ctr">
-              <a:lnSpc>
-                <a:spcPct val="125000"/>
-              </a:lnSpc>
-              <a:spcAft>
-                <a:spcPts val="0"/>
-              </a:spcAft>
-            </a:pPr>
-            <a:r>
-              <a:rPr sz="1000" b="1" i="0" spc="100">
-                <a:solidFill>
-                  <a:srgbClr val="8A6512"/>
-                </a:solidFill>
-                <a:latin typeface="Karla"/>
-              </a:rPr>
-              <a:t>TOGETHER</a:t>
             </a:r>
           </a:p>
         </p:txBody>
@@ -3676,11 +3588,11 @@
               </a:spcAft>
             </a:pPr>
             <a:r>
-              <a:rPr sz="3200" b="1" i="0">
+              <a:rPr sz="3200" b="0" i="0">
                 <a:solidFill>
                   <a:srgbClr val="3F3826"/>
                 </a:solidFill>
-                <a:latin typeface="Libre Caslon Display"/>
+                <a:latin typeface="Georgia"/>
               </a:rPr>
               <a:t>Shrink these</a:t>
             </a:r>
@@ -3722,7 +3634,7 @@
                 <a:solidFill>
                   <a:srgbClr val="706750"/>
                 </a:solidFill>
-                <a:latin typeface="Karla"/>
+                <a:latin typeface="Calibri"/>
               </a:rPr>
               <a:t>What is the smallest first move? It has to be doable sitting where you are.</a:t>
             </a:r>
@@ -3852,11 +3764,11 @@
               </a:spcAft>
             </a:pPr>
             <a:r>
-              <a:rPr sz="1250" b="1" i="0">
+              <a:rPr sz="1250" b="0" i="0">
                 <a:solidFill>
                   <a:srgbClr val="FFFDF7"/>
                 </a:solidFill>
-                <a:latin typeface="Libre Caslon Display"/>
+                <a:latin typeface="Georgia"/>
               </a:rPr>
               <a:t>1</a:t>
             </a:r>
@@ -3894,11 +3806,11 @@
               </a:spcAft>
             </a:pPr>
             <a:r>
-              <a:rPr sz="1400" b="1" i="0">
+              <a:rPr sz="1400" b="0" i="0">
                 <a:solidFill>
                   <a:srgbClr val="3F3826"/>
                 </a:solidFill>
-                <a:latin typeface="Libre Caslon Display"/>
+                <a:latin typeface="Georgia"/>
               </a:rPr>
               <a:t>Tidy my room</a:t>
             </a:r>
@@ -3940,7 +3852,7 @@
                 <a:solidFill>
                   <a:srgbClr val="8A6512"/>
                 </a:solidFill>
-                <a:latin typeface="Karla"/>
+                <a:latin typeface="Calibri"/>
               </a:rPr>
               <a:t>→          ?</a:t>
             </a:r>
@@ -4070,11 +3982,11 @@
               </a:spcAft>
             </a:pPr>
             <a:r>
-              <a:rPr sz="1250" b="1" i="0">
+              <a:rPr sz="1250" b="0" i="0">
                 <a:solidFill>
                   <a:srgbClr val="FFFDF7"/>
                 </a:solidFill>
-                <a:latin typeface="Libre Caslon Display"/>
+                <a:latin typeface="Georgia"/>
               </a:rPr>
               <a:t>2</a:t>
             </a:r>
@@ -4112,11 +4024,11 @@
               </a:spcAft>
             </a:pPr>
             <a:r>
-              <a:rPr sz="1400" b="1" i="0">
+              <a:rPr sz="1400" b="0" i="0">
                 <a:solidFill>
                   <a:srgbClr val="3F3826"/>
                 </a:solidFill>
-                <a:latin typeface="Libre Caslon Display"/>
+                <a:latin typeface="Georgia"/>
               </a:rPr>
               <a:t>Get fit</a:t>
             </a:r>
@@ -4158,7 +4070,7 @@
                 <a:solidFill>
                   <a:srgbClr val="8A6512"/>
                 </a:solidFill>
-                <a:latin typeface="Karla"/>
+                <a:latin typeface="Calibri"/>
               </a:rPr>
               <a:t>→          ?</a:t>
             </a:r>
@@ -4288,11 +4200,11 @@
               </a:spcAft>
             </a:pPr>
             <a:r>
-              <a:rPr sz="1250" b="1" i="0">
+              <a:rPr sz="1250" b="0" i="0">
                 <a:solidFill>
                   <a:srgbClr val="FFFDF7"/>
                 </a:solidFill>
-                <a:latin typeface="Libre Caslon Display"/>
+                <a:latin typeface="Georgia"/>
               </a:rPr>
               <a:t>3</a:t>
             </a:r>
@@ -4330,11 +4242,11 @@
               </a:spcAft>
             </a:pPr>
             <a:r>
-              <a:rPr sz="1400" b="1" i="0">
+              <a:rPr sz="1400" b="0" i="0">
                 <a:solidFill>
                   <a:srgbClr val="3F3826"/>
                 </a:solidFill>
-                <a:latin typeface="Libre Caslon Display"/>
+                <a:latin typeface="Georgia"/>
               </a:rPr>
               <a:t>Reply to the message from Tuesday</a:t>
             </a:r>
@@ -4376,7 +4288,7 @@
                 <a:solidFill>
                   <a:srgbClr val="8A6512"/>
                 </a:solidFill>
-                <a:latin typeface="Karla"/>
+                <a:latin typeface="Calibri"/>
               </a:rPr>
               <a:t>→          ?</a:t>
             </a:r>
@@ -4418,7 +4330,7 @@
                 <a:solidFill>
                   <a:srgbClr val="8A6512"/>
                 </a:solidFill>
-                <a:latin typeface="Karla"/>
+                <a:latin typeface="Calibri"/>
               </a:rPr>
               <a:t>If it takes longer than two minutes to start, it is still too big.</a:t>
             </a:r>
@@ -4484,7 +4396,7 @@
                 <a:solidFill>
                   <a:srgbClr val="A29A80"/>
                 </a:solidFill>
-                <a:latin typeface="Karla"/>
+                <a:latin typeface="Calibri"/>
               </a:rPr>
               <a:t>The Pastoral Guide</a:t>
             </a:r>
@@ -4526,7 +4438,7 @@
                 <a:solidFill>
                   <a:srgbClr val="A29A80"/>
                 </a:solidFill>
-                <a:latin typeface="Karla"/>
+                <a:latin typeface="Calibri"/>
               </a:rPr>
               <a:t>10 / 20</a:t>
             </a:r>
@@ -4630,97 +4542,9 @@
                 <a:solidFill>
                   <a:srgbClr val="8A6512"/>
                 </a:solidFill>
-                <a:latin typeface="Karla"/>
+                <a:latin typeface="Calibri"/>
               </a:rPr>
               <a:t>YOUR TURN, ON THE SHEET</a:t>
-            </a:r>
-          </a:p>
-        </p:txBody>
-      </p:sp>
-      <p:sp>
-        <p:nvSpPr>
-          <p:cNvPr id="4" name="Rounded Rectangle 3"/>
-          <p:cNvSpPr/>
-          <p:nvPr/>
-        </p:nvSpPr>
-        <p:spPr>
-          <a:xfrm>
-            <a:off x="7050024" y="530352"/>
-            <a:ext cx="1408176" cy="347472"/>
-          </a:xfrm>
-          <a:prstGeom prst="roundRect">
-            <a:avLst>
-              <a:gd name="adj" fmla="val 50000"/>
-            </a:avLst>
-          </a:prstGeom>
-          <a:solidFill>
-            <a:srgbClr val="FAF1DE"/>
-          </a:solidFill>
-          <a:ln>
-            <a:noFill/>
-          </a:ln>
-          <a:effectLst/>
-        </p:spPr>
-        <p:style>
-          <a:lnRef idx="1">
-            <a:schemeClr val="accent1"/>
-          </a:lnRef>
-          <a:fillRef idx="3">
-            <a:schemeClr val="accent1"/>
-          </a:fillRef>
-          <a:effectRef idx="2">
-            <a:schemeClr val="accent1"/>
-          </a:effectRef>
-          <a:fontRef idx="minor">
-            <a:schemeClr val="lt1"/>
-          </a:fontRef>
-        </p:style>
-        <p:txBody>
-          <a:bodyPr rtlCol="0" anchor="ctr"/>
-          <a:lstStyle/>
-          <a:p>
-            <a:pPr algn="ctr"/>
-          </a:p>
-        </p:txBody>
-      </p:sp>
-      <p:sp>
-        <p:nvSpPr>
-          <p:cNvPr id="5" name="TextBox 4"/>
-          <p:cNvSpPr txBox="1"/>
-          <p:nvPr/>
-        </p:nvSpPr>
-        <p:spPr>
-          <a:xfrm>
-            <a:off x="7050024" y="589788"/>
-            <a:ext cx="1408176" cy="237744"/>
-          </a:xfrm>
-          <a:prstGeom prst="rect">
-            <a:avLst/>
-          </a:prstGeom>
-          <a:noFill/>
-        </p:spPr>
-        <p:txBody>
-          <a:bodyPr wrap="square" lIns="0" rIns="0" tIns="0" bIns="0" anchor="t">
-            <a:spAutoFit/>
-          </a:bodyPr>
-          <a:lstStyle/>
-          <a:p>
-            <a:pPr algn="ctr">
-              <a:lnSpc>
-                <a:spcPct val="125000"/>
-              </a:lnSpc>
-              <a:spcAft>
-                <a:spcPts val="0"/>
-              </a:spcAft>
-            </a:pPr>
-            <a:r>
-              <a:rPr sz="1000" b="1" i="0" spc="100">
-                <a:solidFill>
-                  <a:srgbClr val="8A6512"/>
-                </a:solidFill>
-                <a:latin typeface="Karla"/>
-              </a:rPr>
-              <a:t>YOUR LIST</a:t>
             </a:r>
           </a:p>
         </p:txBody>
@@ -4756,11 +4580,11 @@
               </a:spcAft>
             </a:pPr>
             <a:r>
-              <a:rPr sz="2900" b="1" i="0">
+              <a:rPr sz="2900" b="0" i="0">
                 <a:solidFill>
                   <a:srgbClr val="3F3826"/>
                 </a:solidFill>
-                <a:latin typeface="Libre Caslon Display"/>
+                <a:latin typeface="Georgia"/>
               </a:rPr>
               <a:t>Three things you are avoiding</a:t>
             </a:r>
@@ -4802,7 +4626,7 @@
                 <a:solidFill>
                   <a:srgbClr val="706750"/>
                 </a:solidFill>
-                <a:latin typeface="Karla"/>
+                <a:latin typeface="Calibri"/>
               </a:rPr>
               <a:t>One for school, one at home, one that is only for you. Nobody reads this.</a:t>
             </a:r>
@@ -4956,11 +4780,11 @@
               </a:spcAft>
             </a:pPr>
             <a:r>
-              <a:rPr sz="1250" b="1" i="0">
+              <a:rPr sz="1250" b="0" i="0">
                 <a:solidFill>
                   <a:srgbClr val="8A6512"/>
                 </a:solidFill>
-                <a:latin typeface="Libre Caslon Display"/>
+                <a:latin typeface="Georgia"/>
               </a:rPr>
               <a:t>One from school</a:t>
             </a:r>
@@ -5114,11 +4938,11 @@
               </a:spcAft>
             </a:pPr>
             <a:r>
-              <a:rPr sz="1250" b="1" i="0">
+              <a:rPr sz="1250" b="0" i="0">
                 <a:solidFill>
                   <a:srgbClr val="8A6512"/>
                 </a:solidFill>
-                <a:latin typeface="Libre Caslon Display"/>
+                <a:latin typeface="Georgia"/>
               </a:rPr>
               <a:t>One from home</a:t>
             </a:r>
@@ -5272,11 +5096,11 @@
               </a:spcAft>
             </a:pPr>
             <a:r>
-              <a:rPr sz="1250" b="1" i="0">
+              <a:rPr sz="1250" b="0" i="0">
                 <a:solidFill>
                   <a:srgbClr val="8A6512"/>
                 </a:solidFill>
-                <a:latin typeface="Libre Caslon Display"/>
+                <a:latin typeface="Georgia"/>
               </a:rPr>
               <a:t>One just for you</a:t>
             </a:r>
@@ -5366,7 +5190,7 @@
                 <a:solidFill>
                   <a:srgbClr val="8A6512"/>
                 </a:solidFill>
-                <a:latin typeface="Karla"/>
+                <a:latin typeface="Calibri"/>
               </a:rPr>
               <a:t>Then score each one out of ten: how much do you want to do it right now?</a:t>
             </a:r>
@@ -5432,7 +5256,7 @@
                 <a:solidFill>
                   <a:srgbClr val="A29A80"/>
                 </a:solidFill>
-                <a:latin typeface="Karla"/>
+                <a:latin typeface="Calibri"/>
               </a:rPr>
               <a:t>The Pastoral Guide</a:t>
             </a:r>
@@ -5474,7 +5298,7 @@
                 <a:solidFill>
                   <a:srgbClr val="A29A80"/>
                 </a:solidFill>
-                <a:latin typeface="Karla"/>
+                <a:latin typeface="Calibri"/>
               </a:rPr>
               <a:t>11 / 20</a:t>
             </a:r>
@@ -5578,97 +5402,9 @@
                 <a:solidFill>
                   <a:srgbClr val="4A4028"/>
                 </a:solidFill>
-                <a:latin typeface="Karla"/>
+                <a:latin typeface="Calibri"/>
               </a:rPr>
               <a:t>THE EXPERIMENT</a:t>
-            </a:r>
-          </a:p>
-        </p:txBody>
-      </p:sp>
-      <p:sp>
-        <p:nvSpPr>
-          <p:cNvPr id="4" name="Rounded Rectangle 3"/>
-          <p:cNvSpPr/>
-          <p:nvPr/>
-        </p:nvSpPr>
-        <p:spPr>
-          <a:xfrm>
-            <a:off x="7086600" y="530352"/>
-            <a:ext cx="1371600" cy="347472"/>
-          </a:xfrm>
-          <a:prstGeom prst="roundRect">
-            <a:avLst>
-              <a:gd name="adj" fmla="val 50000"/>
-            </a:avLst>
-          </a:prstGeom>
-          <a:solidFill>
-            <a:srgbClr val="FFFFFF"/>
-          </a:solidFill>
-          <a:ln>
-            <a:noFill/>
-          </a:ln>
-          <a:effectLst/>
-        </p:spPr>
-        <p:style>
-          <a:lnRef idx="1">
-            <a:schemeClr val="accent1"/>
-          </a:lnRef>
-          <a:fillRef idx="3">
-            <a:schemeClr val="accent1"/>
-          </a:fillRef>
-          <a:effectRef idx="2">
-            <a:schemeClr val="accent1"/>
-          </a:effectRef>
-          <a:fontRef idx="minor">
-            <a:schemeClr val="lt1"/>
-          </a:fontRef>
-        </p:style>
-        <p:txBody>
-          <a:bodyPr rtlCol="0" anchor="ctr"/>
-          <a:lstStyle/>
-          <a:p>
-            <a:pPr algn="ctr"/>
-          </a:p>
-        </p:txBody>
-      </p:sp>
-      <p:sp>
-        <p:nvSpPr>
-          <p:cNvPr id="5" name="TextBox 4"/>
-          <p:cNvSpPr txBox="1"/>
-          <p:nvPr/>
-        </p:nvSpPr>
-        <p:spPr>
-          <a:xfrm>
-            <a:off x="7086600" y="589788"/>
-            <a:ext cx="1371600" cy="237744"/>
-          </a:xfrm>
-          <a:prstGeom prst="rect">
-            <a:avLst/>
-          </a:prstGeom>
-          <a:noFill/>
-        </p:spPr>
-        <p:txBody>
-          <a:bodyPr wrap="square" lIns="0" rIns="0" tIns="0" bIns="0" anchor="t">
-            <a:spAutoFit/>
-          </a:bodyPr>
-          <a:lstStyle/>
-          <a:p>
-            <a:pPr algn="ctr">
-              <a:lnSpc>
-                <a:spcPct val="125000"/>
-              </a:lnSpc>
-              <a:spcAft>
-                <a:spcPts val="0"/>
-              </a:spcAft>
-            </a:pPr>
-            <a:r>
-              <a:rPr sz="1000" b="1" i="0" spc="100">
-                <a:solidFill>
-                  <a:srgbClr val="8A6512"/>
-                </a:solidFill>
-                <a:latin typeface="Karla"/>
-              </a:rPr>
-              <a:t>DO IT</a:t>
             </a:r>
           </a:p>
         </p:txBody>
@@ -5704,11 +5440,11 @@
               </a:spcAft>
             </a:pPr>
             <a:r>
-              <a:rPr sz="3800" b="1" i="0">
+              <a:rPr sz="3800" b="0" i="0">
                 <a:solidFill>
                   <a:srgbClr val="3A3320"/>
                 </a:solidFill>
-                <a:latin typeface="Libre Caslon Display"/>
+                <a:latin typeface="Georgia"/>
               </a:rPr>
               <a:t>Five minutes. Starting now.</a:t>
             </a:r>
@@ -5798,7 +5534,7 @@
                 <a:solidFill>
                   <a:srgbClr val="8A6512"/>
                 </a:solidFill>
-                <a:latin typeface="Karla"/>
+                <a:latin typeface="Calibri"/>
               </a:rPr>
               <a:t>Take the one you scored lowest.</a:t>
             </a:r>
@@ -5888,7 +5624,7 @@
                 <a:solidFill>
                   <a:srgbClr val="8A6512"/>
                 </a:solidFill>
-                <a:latin typeface="Karla"/>
+                <a:latin typeface="Calibri"/>
               </a:rPr>
               <a:t>Shrink it to something you can do at this desk.</a:t>
             </a:r>
@@ -5978,7 +5714,7 @@
                 <a:solidFill>
                   <a:srgbClr val="8A6512"/>
                 </a:solidFill>
-                <a:latin typeface="Karla"/>
+                <a:latin typeface="Calibri"/>
               </a:rPr>
               <a:t>No talking. Just the five minutes.</a:t>
             </a:r>
@@ -6112,7 +5848,7 @@
                 <a:solidFill>
                   <a:srgbClr val="4A4028"/>
                 </a:solidFill>
-                <a:latin typeface="Karla"/>
+                <a:latin typeface="Calibri"/>
               </a:rPr>
               <a:t>The Pastoral Guide</a:t>
             </a:r>
@@ -6154,7 +5890,7 @@
                 <a:solidFill>
                   <a:srgbClr val="4A4028"/>
                 </a:solidFill>
-                <a:latin typeface="Karla"/>
+                <a:latin typeface="Calibri"/>
               </a:rPr>
               <a:t>12 / 20</a:t>
             </a:r>
@@ -6258,97 +5994,9 @@
                 <a:solidFill>
                   <a:srgbClr val="8A6512"/>
                 </a:solidFill>
-                <a:latin typeface="Karla"/>
+                <a:latin typeface="Calibri"/>
               </a:rPr>
               <a:t>STOP. GO BACK TO YOUR SHEET</a:t>
-            </a:r>
-          </a:p>
-        </p:txBody>
-      </p:sp>
-      <p:sp>
-        <p:nvSpPr>
-          <p:cNvPr id="4" name="Rounded Rectangle 3"/>
-          <p:cNvSpPr/>
-          <p:nvPr/>
-        </p:nvSpPr>
-        <p:spPr>
-          <a:xfrm>
-            <a:off x="7086600" y="530352"/>
-            <a:ext cx="1371600" cy="347472"/>
-          </a:xfrm>
-          <a:prstGeom prst="roundRect">
-            <a:avLst>
-              <a:gd name="adj" fmla="val 50000"/>
-            </a:avLst>
-          </a:prstGeom>
-          <a:solidFill>
-            <a:srgbClr val="FAF1DE"/>
-          </a:solidFill>
-          <a:ln>
-            <a:noFill/>
-          </a:ln>
-          <a:effectLst/>
-        </p:spPr>
-        <p:style>
-          <a:lnRef idx="1">
-            <a:schemeClr val="accent1"/>
-          </a:lnRef>
-          <a:fillRef idx="3">
-            <a:schemeClr val="accent1"/>
-          </a:fillRef>
-          <a:effectRef idx="2">
-            <a:schemeClr val="accent1"/>
-          </a:effectRef>
-          <a:fontRef idx="minor">
-            <a:schemeClr val="lt1"/>
-          </a:fontRef>
-        </p:style>
-        <p:txBody>
-          <a:bodyPr rtlCol="0" anchor="ctr"/>
-          <a:lstStyle/>
-          <a:p>
-            <a:pPr algn="ctr"/>
-          </a:p>
-        </p:txBody>
-      </p:sp>
-      <p:sp>
-        <p:nvSpPr>
-          <p:cNvPr id="5" name="TextBox 4"/>
-          <p:cNvSpPr txBox="1"/>
-          <p:nvPr/>
-        </p:nvSpPr>
-        <p:spPr>
-          <a:xfrm>
-            <a:off x="7086600" y="589788"/>
-            <a:ext cx="1371600" cy="237744"/>
-          </a:xfrm>
-          <a:prstGeom prst="rect">
-            <a:avLst/>
-          </a:prstGeom>
-          <a:noFill/>
-        </p:spPr>
-        <p:txBody>
-          <a:bodyPr wrap="square" lIns="0" rIns="0" tIns="0" bIns="0" anchor="t">
-            <a:spAutoFit/>
-          </a:bodyPr>
-          <a:lstStyle/>
-          <a:p>
-            <a:pPr algn="ctr">
-              <a:lnSpc>
-                <a:spcPct val="125000"/>
-              </a:lnSpc>
-              <a:spcAft>
-                <a:spcPts val="0"/>
-              </a:spcAft>
-            </a:pPr>
-            <a:r>
-              <a:rPr sz="1000" b="1" i="0" spc="100">
-                <a:solidFill>
-                  <a:srgbClr val="8A6512"/>
-                </a:solidFill>
-                <a:latin typeface="Karla"/>
-              </a:rPr>
-              <a:t>SCORE IT</a:t>
             </a:r>
           </a:p>
         </p:txBody>
@@ -6384,11 +6032,11 @@
               </a:spcAft>
             </a:pPr>
             <a:r>
-              <a:rPr sz="3200" b="1" i="0">
+              <a:rPr sz="3200" b="0" i="0">
                 <a:solidFill>
                   <a:srgbClr val="3F3826"/>
                 </a:solidFill>
-                <a:latin typeface="Libre Caslon Display"/>
+                <a:latin typeface="Georgia"/>
               </a:rPr>
               <a:t>Score it again</a:t>
             </a:r>
@@ -6430,7 +6078,7 @@
                 <a:solidFill>
                   <a:srgbClr val="706750"/>
                 </a:solidFill>
-                <a:latin typeface="Karla"/>
+                <a:latin typeface="Calibri"/>
               </a:rPr>
               <a:t>Same question. How much do you want to carry on with it, right now?</a:t>
             </a:r>
@@ -6516,11 +6164,11 @@
               </a:spcAft>
             </a:pPr>
             <a:r>
-              <a:rPr sz="1500" b="1" i="0">
+              <a:rPr sz="1500" b="0" i="0">
                 <a:solidFill>
                   <a:srgbClr val="8A6512"/>
                 </a:solidFill>
-                <a:latin typeface="Libre Caslon Display"/>
+                <a:latin typeface="Georgia"/>
               </a:rPr>
               <a:t>Went up</a:t>
             </a:r>
@@ -6562,7 +6210,7 @@
                 <a:solidFill>
                   <a:srgbClr val="706750"/>
                 </a:solidFill>
-                <a:latin typeface="Karla"/>
+                <a:latin typeface="Calibri"/>
               </a:rPr>
               <a:t>Hands up. Usually most of the room.</a:t>
             </a:r>
@@ -6648,11 +6296,11 @@
               </a:spcAft>
             </a:pPr>
             <a:r>
-              <a:rPr sz="1500" b="1" i="0">
+              <a:rPr sz="1500" b="0" i="0">
                 <a:solidFill>
                   <a:srgbClr val="8A6512"/>
                 </a:solidFill>
-                <a:latin typeface="Libre Caslon Display"/>
+                <a:latin typeface="Georgia"/>
               </a:rPr>
               <a:t>Stayed the same</a:t>
             </a:r>
@@ -6694,7 +6342,7 @@
                 <a:solidFill>
                   <a:srgbClr val="706750"/>
                 </a:solidFill>
-                <a:latin typeface="Karla"/>
+                <a:latin typeface="Calibri"/>
               </a:rPr>
               <a:t>Also useful. What stopped it moving?</a:t>
             </a:r>
@@ -6780,11 +6428,11 @@
               </a:spcAft>
             </a:pPr>
             <a:r>
-              <a:rPr sz="1500" b="1" i="0">
+              <a:rPr sz="1500" b="0" i="0">
                 <a:solidFill>
                   <a:srgbClr val="8A6512"/>
                 </a:solidFill>
-                <a:latin typeface="Libre Caslon Display"/>
+                <a:latin typeface="Georgia"/>
               </a:rPr>
               <a:t>Went down</a:t>
             </a:r>
@@ -6826,7 +6474,7 @@
                 <a:solidFill>
                   <a:srgbClr val="706750"/>
                 </a:solidFill>
-                <a:latin typeface="Karla"/>
+                <a:latin typeface="Calibri"/>
               </a:rPr>
               <a:t>The most interesting one in here.</a:t>
             </a:r>
@@ -6868,7 +6516,7 @@
                 <a:solidFill>
                   <a:srgbClr val="8A6512"/>
                 </a:solidFill>
-                <a:latin typeface="Karla"/>
+                <a:latin typeface="Calibri"/>
               </a:rPr>
               <a:t>Count the hands and put the numbers on the board.</a:t>
             </a:r>
@@ -6910,7 +6558,7 @@
                 <a:solidFill>
                   <a:srgbClr val="706750"/>
                 </a:solidFill>
-                <a:latin typeface="Karla"/>
+                <a:latin typeface="Calibri"/>
               </a:rPr>
               <a:t>That is your evidence, not mine. Five minutes ago, most of you did not want to start what you have just been doing.</a:t>
             </a:r>
@@ -6976,7 +6624,7 @@
                 <a:solidFill>
                   <a:srgbClr val="A29A80"/>
                 </a:solidFill>
-                <a:latin typeface="Karla"/>
+                <a:latin typeface="Calibri"/>
               </a:rPr>
               <a:t>The Pastoral Guide</a:t>
             </a:r>
@@ -7018,7 +6666,7 @@
                 <a:solidFill>
                   <a:srgbClr val="A29A80"/>
                 </a:solidFill>
-                <a:latin typeface="Karla"/>
+                <a:latin typeface="Calibri"/>
               </a:rPr>
               <a:t>13 / 20</a:t>
             </a:r>
@@ -7122,97 +6770,9 @@
                 <a:solidFill>
                   <a:srgbClr val="8A6512"/>
                 </a:solidFill>
-                <a:latin typeface="Karla"/>
+                <a:latin typeface="Calibri"/>
               </a:rPr>
               <a:t>WHY THAT HAPPENS</a:t>
-            </a:r>
-          </a:p>
-        </p:txBody>
-      </p:sp>
-      <p:sp>
-        <p:nvSpPr>
-          <p:cNvPr id="4" name="Rounded Rectangle 3"/>
-          <p:cNvSpPr/>
-          <p:nvPr/>
-        </p:nvSpPr>
-        <p:spPr>
-          <a:xfrm>
-            <a:off x="7086600" y="530352"/>
-            <a:ext cx="1371600" cy="347472"/>
-          </a:xfrm>
-          <a:prstGeom prst="roundRect">
-            <a:avLst>
-              <a:gd name="adj" fmla="val 50000"/>
-            </a:avLst>
-          </a:prstGeom>
-          <a:solidFill>
-            <a:srgbClr val="FAF1DE"/>
-          </a:solidFill>
-          <a:ln>
-            <a:noFill/>
-          </a:ln>
-          <a:effectLst/>
-        </p:spPr>
-        <p:style>
-          <a:lnRef idx="1">
-            <a:schemeClr val="accent1"/>
-          </a:lnRef>
-          <a:fillRef idx="3">
-            <a:schemeClr val="accent1"/>
-          </a:fillRef>
-          <a:effectRef idx="2">
-            <a:schemeClr val="accent1"/>
-          </a:effectRef>
-          <a:fontRef idx="minor">
-            <a:schemeClr val="lt1"/>
-          </a:fontRef>
-        </p:style>
-        <p:txBody>
-          <a:bodyPr rtlCol="0" anchor="ctr"/>
-          <a:lstStyle/>
-          <a:p>
-            <a:pPr algn="ctr"/>
-          </a:p>
-        </p:txBody>
-      </p:sp>
-      <p:sp>
-        <p:nvSpPr>
-          <p:cNvPr id="5" name="TextBox 4"/>
-          <p:cNvSpPr txBox="1"/>
-          <p:nvPr/>
-        </p:nvSpPr>
-        <p:spPr>
-          <a:xfrm>
-            <a:off x="7086600" y="589788"/>
-            <a:ext cx="1371600" cy="237744"/>
-          </a:xfrm>
-          <a:prstGeom prst="rect">
-            <a:avLst/>
-          </a:prstGeom>
-          <a:noFill/>
-        </p:spPr>
-        <p:txBody>
-          <a:bodyPr wrap="square" lIns="0" rIns="0" tIns="0" bIns="0" anchor="t">
-            <a:spAutoFit/>
-          </a:bodyPr>
-          <a:lstStyle/>
-          <a:p>
-            <a:pPr algn="ctr">
-              <a:lnSpc>
-                <a:spcPct val="125000"/>
-              </a:lnSpc>
-              <a:spcAft>
-                <a:spcPts val="0"/>
-              </a:spcAft>
-            </a:pPr>
-            <a:r>
-              <a:rPr sz="1000" b="1" i="0" spc="100">
-                <a:solidFill>
-                  <a:srgbClr val="8A6512"/>
-                </a:solidFill>
-                <a:latin typeface="Karla"/>
-              </a:rPr>
-              <a:t>LEARN</a:t>
             </a:r>
           </a:p>
         </p:txBody>
@@ -7248,11 +6808,11 @@
               </a:spcAft>
             </a:pPr>
             <a:r>
-              <a:rPr sz="3100" b="1" i="0">
+              <a:rPr sz="3100" b="0" i="0">
                 <a:solidFill>
                   <a:srgbClr val="3F3826"/>
                 </a:solidFill>
-                <a:latin typeface="Libre Caslon Display"/>
+                <a:latin typeface="Georgia"/>
               </a:rPr>
               <a:t>Starting is the expensive bit</a:t>
             </a:r>
@@ -7406,21 +6966,21 @@
               </a:spcAft>
             </a:pPr>
             <a:r>
-              <a:rPr sz="1450" b="1" i="0">
+              <a:rPr sz="1450" b="0" i="0">
                 <a:solidFill>
                   <a:srgbClr val="8A6512"/>
                 </a:solidFill>
-                <a:latin typeface="Libre Caslon Display"/>
+                <a:latin typeface="Georgia"/>
               </a:rPr>
               <a:t>The first move costs the most.</a:t>
             </a:r>
             <a:br/>
             <a:r>
-              <a:rPr sz="1450" b="1" i="0">
+              <a:rPr sz="1450" b="0" i="0">
                 <a:solidFill>
                   <a:srgbClr val="8A6512"/>
                 </a:solidFill>
-                <a:latin typeface="Libre Caslon Display"/>
+                <a:latin typeface="Georgia"/>
               </a:rPr>
               <a:t>Everything after it is cheaper.</a:t>
             </a:r>
@@ -7574,21 +7134,21 @@
               </a:spcAft>
             </a:pPr>
             <a:r>
-              <a:rPr sz="1450" b="1" i="0">
+              <a:rPr sz="1450" b="0" i="0">
                 <a:solidFill>
                   <a:srgbClr val="8A6512"/>
                 </a:solidFill>
-                <a:latin typeface="Libre Caslon Display"/>
+                <a:latin typeface="Georgia"/>
               </a:rPr>
               <a:t>Half-done things nag at you.</a:t>
             </a:r>
             <a:br/>
             <a:r>
-              <a:rPr sz="1450" b="1" i="0">
+              <a:rPr sz="1450" b="0" i="0">
                 <a:solidFill>
                   <a:srgbClr val="8A6512"/>
                 </a:solidFill>
-                <a:latin typeface="Libre Caslon Display"/>
+                <a:latin typeface="Georgia"/>
               </a:rPr>
               <a:t>Finished ones go quiet.</a:t>
             </a:r>
@@ -7742,28 +7302,28 @@
               </a:spcAft>
             </a:pPr>
             <a:r>
-              <a:rPr sz="1450" b="1" i="0">
+              <a:rPr sz="1363" b="0" i="0">
                 <a:solidFill>
                   <a:srgbClr val="8A6512"/>
                 </a:solidFill>
-                <a:latin typeface="Libre Caslon Display"/>
+                <a:latin typeface="Georgia"/>
               </a:rPr>
               <a:t>Five minutes in, it stops being scary</a:t>
             </a:r>
             <a:br>
-              <a:rPr sz="1450" b="1" i="0">
+              <a:rPr sz="1450" b="0" i="0">
                 <a:solidFill>
                   <a:srgbClr val="8A6512"/>
                 </a:solidFill>
-                <a:latin typeface="Libre Caslon Display"/>
+                <a:latin typeface="Georgia"/>
               </a:rPr>
             </a:br>
             <a:r>
-              <a:rPr sz="1450" b="1" i="0">
+              <a:rPr sz="1363" b="0" i="0">
                 <a:solidFill>
                   <a:srgbClr val="8A6512"/>
                 </a:solidFill>
-                <a:latin typeface="Libre Caslon Display"/>
+                <a:latin typeface="Georgia"/>
               </a:rPr>
               <a:t>and starts being something you can measure.</a:t>
             </a:r>
@@ -7805,7 +7365,7 @@
                 <a:solidFill>
                   <a:srgbClr val="8A6512"/>
                 </a:solidFill>
-                <a:latin typeface="Karla"/>
+                <a:latin typeface="Calibri"/>
               </a:rPr>
               <a:t>Psychologists call it behavioural activation. Action first, feeling second.</a:t>
             </a:r>
@@ -7871,7 +7431,7 @@
                 <a:solidFill>
                   <a:srgbClr val="A29A80"/>
                 </a:solidFill>
-                <a:latin typeface="Karla"/>
+                <a:latin typeface="Calibri"/>
               </a:rPr>
               <a:t>The Pastoral Guide</a:t>
             </a:r>
@@ -7913,7 +7473,7 @@
                 <a:solidFill>
                   <a:srgbClr val="A29A80"/>
                 </a:solidFill>
-                <a:latin typeface="Karla"/>
+                <a:latin typeface="Calibri"/>
               </a:rPr>
               <a:t>14 / 20</a:t>
             </a:r>
@@ -8017,97 +7577,9 @@
                 <a:solidFill>
                   <a:srgbClr val="4A4028"/>
                 </a:solidFill>
-                <a:latin typeface="Karla"/>
+                <a:latin typeface="Calibri"/>
               </a:rPr>
               <a:t>TALK ABOUT IT</a:t>
-            </a:r>
-          </a:p>
-        </p:txBody>
-      </p:sp>
-      <p:sp>
-        <p:nvSpPr>
-          <p:cNvPr id="4" name="Rounded Rectangle 3"/>
-          <p:cNvSpPr/>
-          <p:nvPr/>
-        </p:nvSpPr>
-        <p:spPr>
-          <a:xfrm>
-            <a:off x="7086600" y="530352"/>
-            <a:ext cx="1371600" cy="347472"/>
-          </a:xfrm>
-          <a:prstGeom prst="roundRect">
-            <a:avLst>
-              <a:gd name="adj" fmla="val 50000"/>
-            </a:avLst>
-          </a:prstGeom>
-          <a:solidFill>
-            <a:srgbClr val="FFFFFF"/>
-          </a:solidFill>
-          <a:ln>
-            <a:noFill/>
-          </a:ln>
-          <a:effectLst/>
-        </p:spPr>
-        <p:style>
-          <a:lnRef idx="1">
-            <a:schemeClr val="accent1"/>
-          </a:lnRef>
-          <a:fillRef idx="3">
-            <a:schemeClr val="accent1"/>
-          </a:fillRef>
-          <a:effectRef idx="2">
-            <a:schemeClr val="accent1"/>
-          </a:effectRef>
-          <a:fontRef idx="minor">
-            <a:schemeClr val="lt1"/>
-          </a:fontRef>
-        </p:style>
-        <p:txBody>
-          <a:bodyPr rtlCol="0" anchor="ctr"/>
-          <a:lstStyle/>
-          <a:p>
-            <a:pPr algn="ctr"/>
-          </a:p>
-        </p:txBody>
-      </p:sp>
-      <p:sp>
-        <p:nvSpPr>
-          <p:cNvPr id="5" name="TextBox 4"/>
-          <p:cNvSpPr txBox="1"/>
-          <p:nvPr/>
-        </p:nvSpPr>
-        <p:spPr>
-          <a:xfrm>
-            <a:off x="7086600" y="589788"/>
-            <a:ext cx="1371600" cy="237744"/>
-          </a:xfrm>
-          <a:prstGeom prst="rect">
-            <a:avLst/>
-          </a:prstGeom>
-          <a:noFill/>
-        </p:spPr>
-        <p:txBody>
-          <a:bodyPr wrap="square" lIns="0" rIns="0" tIns="0" bIns="0" anchor="t">
-            <a:spAutoFit/>
-          </a:bodyPr>
-          <a:lstStyle/>
-          <a:p>
-            <a:pPr algn="ctr">
-              <a:lnSpc>
-                <a:spcPct val="125000"/>
-              </a:lnSpc>
-              <a:spcAft>
-                <a:spcPts val="0"/>
-              </a:spcAft>
-            </a:pPr>
-            <a:r>
-              <a:rPr sz="1000" b="1" i="0" spc="100">
-                <a:solidFill>
-                  <a:srgbClr val="8A6512"/>
-                </a:solidFill>
-                <a:latin typeface="Karla"/>
-              </a:rPr>
-              <a:t>DISCUSS</a:t>
             </a:r>
           </a:p>
         </p:txBody>
@@ -8143,11 +7615,11 @@
               </a:spcAft>
             </a:pPr>
             <a:r>
-              <a:rPr sz="3400" b="1" i="0">
+              <a:rPr sz="3400" b="0" i="0">
                 <a:solidFill>
                   <a:srgbClr val="3A3320"/>
                 </a:solidFill>
-                <a:latin typeface="Libre Caslon Display"/>
+                <a:latin typeface="Georgia"/>
               </a:rPr>
               <a:t>Three hard questions</a:t>
             </a:r>
@@ -8277,11 +7749,11 @@
               </a:spcAft>
             </a:pPr>
             <a:r>
-              <a:rPr sz="1200" b="1" i="0">
+              <a:rPr sz="1200" b="0" i="0">
                 <a:solidFill>
                   <a:srgbClr val="FFFDF7"/>
                 </a:solidFill>
-                <a:latin typeface="Libre Caslon Display"/>
+                <a:latin typeface="Georgia"/>
               </a:rPr>
               <a:t>1</a:t>
             </a:r>
@@ -8323,7 +7795,7 @@
                 <a:solidFill>
                   <a:srgbClr val="8A6512"/>
                 </a:solidFill>
-                <a:latin typeface="Karla"/>
+                <a:latin typeface="Calibri"/>
               </a:rPr>
               <a:t>Whose score went down, and what does that tell you about the task?</a:t>
             </a:r>
@@ -8453,11 +7925,11 @@
               </a:spcAft>
             </a:pPr>
             <a:r>
-              <a:rPr sz="1200" b="1" i="0">
+              <a:rPr sz="1200" b="0" i="0">
                 <a:solidFill>
                   <a:srgbClr val="FFFDF7"/>
                 </a:solidFill>
-                <a:latin typeface="Libre Caslon Display"/>
+                <a:latin typeface="Georgia"/>
               </a:rPr>
               <a:t>2</a:t>
             </a:r>
@@ -8499,7 +7971,7 @@
                 <a:solidFill>
                   <a:srgbClr val="8A6512"/>
                 </a:solidFill>
-                <a:latin typeface="Karla"/>
+                <a:latin typeface="Calibri"/>
               </a:rPr>
               <a:t>If starting is the hard bit, why do we keep waiting to feel ready?</a:t>
             </a:r>
@@ -8629,11 +8101,11 @@
               </a:spcAft>
             </a:pPr>
             <a:r>
-              <a:rPr sz="1200" b="1" i="0">
+              <a:rPr sz="1200" b="0" i="0">
                 <a:solidFill>
                   <a:srgbClr val="FFFDF7"/>
                 </a:solidFill>
-                <a:latin typeface="Libre Caslon Display"/>
+                <a:latin typeface="Georgia"/>
               </a:rPr>
               <a:t>3</a:t>
             </a:r>
@@ -8675,7 +8147,7 @@
                 <a:solidFill>
                   <a:srgbClr val="8A6512"/>
                 </a:solidFill>
-                <a:latin typeface="Karla"/>
+                <a:latin typeface="Calibri"/>
               </a:rPr>
               <a:t>Is there anything on your list that you should just cross off instead?</a:t>
             </a:r>
@@ -8717,7 +8189,7 @@
                 <a:solidFill>
                   <a:srgbClr val="4A4028"/>
                 </a:solidFill>
-                <a:latin typeface="Karla"/>
+                <a:latin typeface="Calibri"/>
               </a:rPr>
               <a:t>The third question matters most. Not everything on a list deserves to be there.</a:t>
             </a:r>
@@ -8783,7 +8255,7 @@
                 <a:solidFill>
                   <a:srgbClr val="4A4028"/>
                 </a:solidFill>
-                <a:latin typeface="Karla"/>
+                <a:latin typeface="Calibri"/>
               </a:rPr>
               <a:t>The Pastoral Guide</a:t>
             </a:r>
@@ -8825,7 +8297,7 @@
                 <a:solidFill>
                   <a:srgbClr val="4A4028"/>
                 </a:solidFill>
-                <a:latin typeface="Karla"/>
+                <a:latin typeface="Calibri"/>
               </a:rPr>
               <a:t>15 / 20</a:t>
             </a:r>
@@ -8929,97 +8401,9 @@
                 <a:solidFill>
                   <a:srgbClr val="8A6512"/>
                 </a:solidFill>
-                <a:latin typeface="Karla"/>
+                <a:latin typeface="Calibri"/>
               </a:rPr>
               <a:t>THERE IS A SAYING ABOUT THIS</a:t>
-            </a:r>
-          </a:p>
-        </p:txBody>
-      </p:sp>
-      <p:sp>
-        <p:nvSpPr>
-          <p:cNvPr id="4" name="Rounded Rectangle 3"/>
-          <p:cNvSpPr/>
-          <p:nvPr/>
-        </p:nvSpPr>
-        <p:spPr>
-          <a:xfrm>
-            <a:off x="7086600" y="530352"/>
-            <a:ext cx="1371600" cy="347472"/>
-          </a:xfrm>
-          <a:prstGeom prst="roundRect">
-            <a:avLst>
-              <a:gd name="adj" fmla="val 50000"/>
-            </a:avLst>
-          </a:prstGeom>
-          <a:solidFill>
-            <a:srgbClr val="FAF1DE"/>
-          </a:solidFill>
-          <a:ln>
-            <a:noFill/>
-          </a:ln>
-          <a:effectLst/>
-        </p:spPr>
-        <p:style>
-          <a:lnRef idx="1">
-            <a:schemeClr val="accent1"/>
-          </a:lnRef>
-          <a:fillRef idx="3">
-            <a:schemeClr val="accent1"/>
-          </a:fillRef>
-          <a:effectRef idx="2">
-            <a:schemeClr val="accent1"/>
-          </a:effectRef>
-          <a:fontRef idx="minor">
-            <a:schemeClr val="lt1"/>
-          </a:fontRef>
-        </p:style>
-        <p:txBody>
-          <a:bodyPr rtlCol="0" anchor="ctr"/>
-          <a:lstStyle/>
-          <a:p>
-            <a:pPr algn="ctr"/>
-          </a:p>
-        </p:txBody>
-      </p:sp>
-      <p:sp>
-        <p:nvSpPr>
-          <p:cNvPr id="5" name="TextBox 4"/>
-          <p:cNvSpPr txBox="1"/>
-          <p:nvPr/>
-        </p:nvSpPr>
-        <p:spPr>
-          <a:xfrm>
-            <a:off x="7086600" y="589788"/>
-            <a:ext cx="1371600" cy="237744"/>
-          </a:xfrm>
-          <a:prstGeom prst="rect">
-            <a:avLst/>
-          </a:prstGeom>
-          <a:noFill/>
-        </p:spPr>
-        <p:txBody>
-          <a:bodyPr wrap="square" lIns="0" rIns="0" tIns="0" bIns="0" anchor="t">
-            <a:spAutoFit/>
-          </a:bodyPr>
-          <a:lstStyle/>
-          <a:p>
-            <a:pPr algn="ctr">
-              <a:lnSpc>
-                <a:spcPct val="125000"/>
-              </a:lnSpc>
-              <a:spcAft>
-                <a:spcPts val="0"/>
-              </a:spcAft>
-            </a:pPr>
-            <a:r>
-              <a:rPr sz="1000" b="1" i="0" spc="100">
-                <a:solidFill>
-                  <a:srgbClr val="8A6512"/>
-                </a:solidFill>
-                <a:latin typeface="Karla"/>
-              </a:rPr>
-              <a:t>WEIGH IT</a:t>
             </a:r>
           </a:p>
         </p:txBody>
@@ -9055,11 +8439,11 @@
               </a:spcAft>
             </a:pPr>
             <a:r>
-              <a:rPr sz="3200" b="1" i="0">
+              <a:rPr sz="3200" b="0" i="0">
                 <a:solidFill>
                   <a:srgbClr val="3F3826"/>
                 </a:solidFill>
-                <a:latin typeface="Libre Caslon Display"/>
+                <a:latin typeface="Georgia"/>
               </a:rPr>
               <a:t>“Busy people stay busy”</a:t>
             </a:r>
@@ -9101,7 +8485,7 @@
                 <a:solidFill>
                   <a:srgbClr val="706750"/>
                 </a:solidFill>
-                <a:latin typeface="Karla"/>
+                <a:latin typeface="Calibri"/>
               </a:rPr>
               <a:t>It is half right, and the wrong half does harm.</a:t>
             </a:r>
@@ -9259,7 +8643,7 @@
                 <a:solidFill>
                   <a:srgbClr val="706750"/>
                 </a:solidFill>
-                <a:latin typeface="Karla"/>
+                <a:latin typeface="Calibri"/>
               </a:rPr>
               <a:t>TRUE</a:t>
             </a:r>
@@ -9297,21 +8681,21 @@
               </a:spcAft>
             </a:pPr>
             <a:r>
-              <a:rPr sz="1400" b="1" i="0">
+              <a:rPr sz="1400" b="0" i="0">
                 <a:solidFill>
                   <a:srgbClr val="8A6512"/>
                 </a:solidFill>
-                <a:latin typeface="Libre Caslon Display"/>
+                <a:latin typeface="Georgia"/>
               </a:rPr>
               <a:t>Momentum is real.</a:t>
             </a:r>
             <a:br/>
             <a:r>
-              <a:rPr sz="1400" b="1" i="0">
+              <a:rPr sz="1400" b="0" i="0">
                 <a:solidFill>
                   <a:srgbClr val="8A6512"/>
                 </a:solidFill>
-                <a:latin typeface="Libre Caslon Display"/>
+                <a:latin typeface="Georgia"/>
               </a:rPr>
               <a:t>You just proved it.</a:t>
             </a:r>
@@ -9469,7 +8853,7 @@
                 <a:solidFill>
                   <a:srgbClr val="706750"/>
                 </a:solidFill>
-                <a:latin typeface="Karla"/>
+                <a:latin typeface="Calibri"/>
               </a:rPr>
               <a:t>NOT TRUE</a:t>
             </a:r>
@@ -9507,21 +8891,21 @@
               </a:spcAft>
             </a:pPr>
             <a:r>
-              <a:rPr sz="1400" b="1" i="0">
+              <a:rPr sz="1400" b="0" i="0">
                 <a:solidFill>
                   <a:srgbClr val="8A6512"/>
                 </a:solidFill>
-                <a:latin typeface="Libre Caslon Display"/>
+                <a:latin typeface="Georgia"/>
               </a:rPr>
               <a:t>That being busy is the point.</a:t>
             </a:r>
             <a:br/>
             <a:r>
-              <a:rPr sz="1400" b="1" i="0">
+              <a:rPr sz="1400" b="0" i="0">
                 <a:solidFill>
                   <a:srgbClr val="8A6512"/>
                 </a:solidFill>
-                <a:latin typeface="Libre Caslon Display"/>
+                <a:latin typeface="Georgia"/>
               </a:rPr>
               <a:t>A full day can hold nothing.</a:t>
             </a:r>
@@ -9563,7 +8947,7 @@
                 <a:solidFill>
                   <a:srgbClr val="8A6512"/>
                 </a:solidFill>
-                <a:latin typeface="Karla"/>
+                <a:latin typeface="Calibri"/>
               </a:rPr>
               <a:t>What the saying really means is started, not busy.</a:t>
             </a:r>
@@ -9629,7 +9013,7 @@
                 <a:solidFill>
                   <a:srgbClr val="A29A80"/>
                 </a:solidFill>
-                <a:latin typeface="Karla"/>
+                <a:latin typeface="Calibri"/>
               </a:rPr>
               <a:t>The Pastoral Guide</a:t>
             </a:r>
@@ -9671,7 +9055,7 @@
                 <a:solidFill>
                   <a:srgbClr val="A29A80"/>
                 </a:solidFill>
-                <a:latin typeface="Karla"/>
+                <a:latin typeface="Calibri"/>
               </a:rPr>
               <a:t>16 / 20</a:t>
             </a:r>
@@ -9775,97 +9159,9 @@
                 <a:solidFill>
                   <a:srgbClr val="8A6512"/>
                 </a:solidFill>
-                <a:latin typeface="Karla"/>
+                <a:latin typeface="Calibri"/>
               </a:rPr>
               <a:t>SORT THE CARDS ON YOUR TABLE</a:t>
-            </a:r>
-          </a:p>
-        </p:txBody>
-      </p:sp>
-      <p:sp>
-        <p:nvSpPr>
-          <p:cNvPr id="4" name="Rounded Rectangle 3"/>
-          <p:cNvSpPr/>
-          <p:nvPr/>
-        </p:nvSpPr>
-        <p:spPr>
-          <a:xfrm>
-            <a:off x="7086600" y="530352"/>
-            <a:ext cx="1371600" cy="347472"/>
-          </a:xfrm>
-          <a:prstGeom prst="roundRect">
-            <a:avLst>
-              <a:gd name="adj" fmla="val 50000"/>
-            </a:avLst>
-          </a:prstGeom>
-          <a:solidFill>
-            <a:srgbClr val="FAF1DE"/>
-          </a:solidFill>
-          <a:ln>
-            <a:noFill/>
-          </a:ln>
-          <a:effectLst/>
-        </p:spPr>
-        <p:style>
-          <a:lnRef idx="1">
-            <a:schemeClr val="accent1"/>
-          </a:lnRef>
-          <a:fillRef idx="3">
-            <a:schemeClr val="accent1"/>
-          </a:fillRef>
-          <a:effectRef idx="2">
-            <a:schemeClr val="accent1"/>
-          </a:effectRef>
-          <a:fontRef idx="minor">
-            <a:schemeClr val="lt1"/>
-          </a:fontRef>
-        </p:style>
-        <p:txBody>
-          <a:bodyPr rtlCol="0" anchor="ctr"/>
-          <a:lstStyle/>
-          <a:p>
-            <a:pPr algn="ctr"/>
-          </a:p>
-        </p:txBody>
-      </p:sp>
-      <p:sp>
-        <p:nvSpPr>
-          <p:cNvPr id="5" name="TextBox 4"/>
-          <p:cNvSpPr txBox="1"/>
-          <p:nvPr/>
-        </p:nvSpPr>
-        <p:spPr>
-          <a:xfrm>
-            <a:off x="7086600" y="589788"/>
-            <a:ext cx="1371600" cy="237744"/>
-          </a:xfrm>
-          <a:prstGeom prst="rect">
-            <a:avLst/>
-          </a:prstGeom>
-          <a:noFill/>
-        </p:spPr>
-        <p:txBody>
-          <a:bodyPr wrap="square" lIns="0" rIns="0" tIns="0" bIns="0" anchor="t">
-            <a:spAutoFit/>
-          </a:bodyPr>
-          <a:lstStyle/>
-          <a:p>
-            <a:pPr algn="ctr">
-              <a:lnSpc>
-                <a:spcPct val="125000"/>
-              </a:lnSpc>
-              <a:spcAft>
-                <a:spcPts val="0"/>
-              </a:spcAft>
-            </a:pPr>
-            <a:r>
-              <a:rPr sz="1000" b="1" i="0" spc="100">
-                <a:solidFill>
-                  <a:srgbClr val="8A6512"/>
-                </a:solidFill>
-                <a:latin typeface="Karla"/>
-              </a:rPr>
-              <a:t>WEIGH IT</a:t>
             </a:r>
           </a:p>
         </p:txBody>
@@ -9901,11 +9197,11 @@
               </a:spcAft>
             </a:pPr>
             <a:r>
-              <a:rPr sz="3200" b="1" i="0">
+              <a:rPr sz="3200" b="0" i="0">
                 <a:solidFill>
                   <a:srgbClr val="3F3826"/>
                 </a:solidFill>
-                <a:latin typeface="Libre Caslon Display"/>
+                <a:latin typeface="Georgia"/>
               </a:rPr>
               <a:t>Three piles, not two</a:t>
             </a:r>
@@ -10059,11 +9355,11 @@
               </a:spcAft>
             </a:pPr>
             <a:r>
-              <a:rPr sz="1700" b="1" i="0">
+              <a:rPr sz="1700" b="0" i="0">
                 <a:solidFill>
                   <a:srgbClr val="8A6512"/>
                 </a:solidFill>
-                <a:latin typeface="Libre Caslon Display"/>
+                <a:latin typeface="Georgia"/>
               </a:rPr>
               <a:t>Action</a:t>
             </a:r>
@@ -10105,7 +9401,7 @@
                 <a:solidFill>
                   <a:srgbClr val="706750"/>
                 </a:solidFill>
-                <a:latin typeface="Karla"/>
+                <a:latin typeface="Calibri"/>
               </a:rPr>
               <a:t>It moved the thing forward, even slightly.</a:t>
             </a:r>
@@ -10259,11 +9555,11 @@
               </a:spcAft>
             </a:pPr>
             <a:r>
-              <a:rPr sz="1700" b="1" i="0">
+              <a:rPr sz="1700" b="0" i="0">
                 <a:solidFill>
                   <a:srgbClr val="8A6512"/>
                 </a:solidFill>
-                <a:latin typeface="Libre Caslon Display"/>
+                <a:latin typeface="Georgia"/>
               </a:rPr>
               <a:t>Motion</a:t>
             </a:r>
@@ -10305,7 +9601,7 @@
                 <a:solidFill>
                   <a:srgbClr val="706750"/>
                 </a:solidFill>
-                <a:latin typeface="Karla"/>
+                <a:latin typeface="Calibri"/>
               </a:rPr>
               <a:t>It felt like work and moved nothing. Be honest.</a:t>
             </a:r>
@@ -10459,11 +9755,11 @@
               </a:spcAft>
             </a:pPr>
             <a:r>
-              <a:rPr sz="1700" b="1" i="0">
+              <a:rPr sz="1700" b="0" i="0">
                 <a:solidFill>
                   <a:srgbClr val="8A6512"/>
                 </a:solidFill>
-                <a:latin typeface="Libre Caslon Display"/>
+                <a:latin typeface="Georgia"/>
               </a:rPr>
               <a:t>Real rest</a:t>
             </a:r>
@@ -10505,7 +9801,7 @@
                 <a:solidFill>
                   <a:srgbClr val="706750"/>
                 </a:solidFill>
-                <a:latin typeface="Karla"/>
+                <a:latin typeface="Calibri"/>
               </a:rPr>
               <a:t>Chosen on purpose, and it put something back.</a:t>
             </a:r>
@@ -10547,7 +9843,7 @@
                 <a:solidFill>
                   <a:srgbClr val="8A6512"/>
                 </a:solidFill>
-                <a:latin typeface="Karla"/>
+                <a:latin typeface="Calibri"/>
               </a:rPr>
               <a:t>Rest is not the opposite of action. Avoidance is, and it is the pile in the middle.</a:t>
             </a:r>
@@ -10613,7 +9909,7 @@
                 <a:solidFill>
                   <a:srgbClr val="A29A80"/>
                 </a:solidFill>
-                <a:latin typeface="Karla"/>
+                <a:latin typeface="Calibri"/>
               </a:rPr>
               <a:t>The Pastoral Guide</a:t>
             </a:r>
@@ -10655,7 +9951,7 @@
                 <a:solidFill>
                   <a:srgbClr val="A29A80"/>
                 </a:solidFill>
-                <a:latin typeface="Karla"/>
+                <a:latin typeface="Calibri"/>
               </a:rPr>
               <a:t>17 / 20</a:t>
             </a:r>
@@ -10759,97 +10055,9 @@
                 <a:solidFill>
                   <a:srgbClr val="8A6512"/>
                 </a:solidFill>
-                <a:latin typeface="Karla"/>
+                <a:latin typeface="Calibri"/>
               </a:rPr>
               <a:t>ON THE SLIP, THEN KEEP IT</a:t>
-            </a:r>
-          </a:p>
-        </p:txBody>
-      </p:sp>
-      <p:sp>
-        <p:nvSpPr>
-          <p:cNvPr id="4" name="Rounded Rectangle 3"/>
-          <p:cNvSpPr/>
-          <p:nvPr/>
-        </p:nvSpPr>
-        <p:spPr>
-          <a:xfrm>
-            <a:off x="7086600" y="530352"/>
-            <a:ext cx="1371600" cy="347472"/>
-          </a:xfrm>
-          <a:prstGeom prst="roundRect">
-            <a:avLst>
-              <a:gd name="adj" fmla="val 50000"/>
-            </a:avLst>
-          </a:prstGeom>
-          <a:solidFill>
-            <a:srgbClr val="FAF1DE"/>
-          </a:solidFill>
-          <a:ln>
-            <a:noFill/>
-          </a:ln>
-          <a:effectLst/>
-        </p:spPr>
-        <p:style>
-          <a:lnRef idx="1">
-            <a:schemeClr val="accent1"/>
-          </a:lnRef>
-          <a:fillRef idx="3">
-            <a:schemeClr val="accent1"/>
-          </a:fillRef>
-          <a:effectRef idx="2">
-            <a:schemeClr val="accent1"/>
-          </a:effectRef>
-          <a:fontRef idx="minor">
-            <a:schemeClr val="lt1"/>
-          </a:fontRef>
-        </p:style>
-        <p:txBody>
-          <a:bodyPr rtlCol="0" anchor="ctr"/>
-          <a:lstStyle/>
-          <a:p>
-            <a:pPr algn="ctr"/>
-          </a:p>
-        </p:txBody>
-      </p:sp>
-      <p:sp>
-        <p:nvSpPr>
-          <p:cNvPr id="5" name="TextBox 4"/>
-          <p:cNvSpPr txBox="1"/>
-          <p:nvPr/>
-        </p:nvSpPr>
-        <p:spPr>
-          <a:xfrm>
-            <a:off x="7086600" y="589788"/>
-            <a:ext cx="1371600" cy="237744"/>
-          </a:xfrm>
-          <a:prstGeom prst="rect">
-            <a:avLst/>
-          </a:prstGeom>
-          <a:noFill/>
-        </p:spPr>
-        <p:txBody>
-          <a:bodyPr wrap="square" lIns="0" rIns="0" tIns="0" bIns="0" anchor="t">
-            <a:spAutoFit/>
-          </a:bodyPr>
-          <a:lstStyle/>
-          <a:p>
-            <a:pPr algn="ctr">
-              <a:lnSpc>
-                <a:spcPct val="125000"/>
-              </a:lnSpc>
-              <a:spcAft>
-                <a:spcPts val="0"/>
-              </a:spcAft>
-            </a:pPr>
-            <a:r>
-              <a:rPr sz="1000" b="1" i="0" spc="100">
-                <a:solidFill>
-                  <a:srgbClr val="8A6512"/>
-                </a:solidFill>
-                <a:latin typeface="Karla"/>
-              </a:rPr>
-              <a:t>EXIT SLIP</a:t>
             </a:r>
           </a:p>
         </p:txBody>
@@ -10885,11 +10093,11 @@
               </a:spcAft>
             </a:pPr>
             <a:r>
-              <a:rPr sz="3100" b="1" i="0">
+              <a:rPr sz="3100" b="0" i="0">
                 <a:solidFill>
                   <a:srgbClr val="3F3826"/>
                 </a:solidFill>
-                <a:latin typeface="Libre Caslon Display"/>
+                <a:latin typeface="Georgia"/>
               </a:rPr>
               <a:t>One thing. One first move.</a:t>
             </a:r>
@@ -10931,7 +10139,7 @@
                 <a:solidFill>
                   <a:srgbClr val="706750"/>
                 </a:solidFill>
-                <a:latin typeface="Karla"/>
+                <a:latin typeface="Calibri"/>
               </a:rPr>
               <a:t>This one is yours. It is not collected and nobody is going to ask you about it.</a:t>
             </a:r>
@@ -11017,11 +10225,11 @@
               </a:spcAft>
             </a:pPr>
             <a:r>
-              <a:rPr sz="1400" b="1" i="0">
+              <a:rPr sz="1400" b="0" i="0">
                 <a:solidFill>
                   <a:srgbClr val="8A6512"/>
                 </a:solidFill>
-                <a:latin typeface="Libre Caslon Display"/>
+                <a:latin typeface="Georgia"/>
               </a:rPr>
               <a:t>The thing</a:t>
             </a:r>
@@ -11063,7 +10271,7 @@
                 <a:solidFill>
                   <a:srgbClr val="706750"/>
                 </a:solidFill>
-                <a:latin typeface="Karla"/>
+                <a:latin typeface="Calibri"/>
               </a:rPr>
               <a:t>The one you have been avoiding longest.</a:t>
             </a:r>
@@ -11149,11 +10357,11 @@
               </a:spcAft>
             </a:pPr>
             <a:r>
-              <a:rPr sz="1400" b="1" i="0">
+              <a:rPr sz="1400" b="0" i="0">
                 <a:solidFill>
                   <a:srgbClr val="8A6512"/>
                 </a:solidFill>
-                <a:latin typeface="Libre Caslon Display"/>
+                <a:latin typeface="Georgia"/>
               </a:rPr>
               <a:t>The first move</a:t>
             </a:r>
@@ -11195,7 +10403,7 @@
                 <a:solidFill>
                   <a:srgbClr val="706750"/>
                 </a:solidFill>
-                <a:latin typeface="Karla"/>
+                <a:latin typeface="Calibri"/>
               </a:rPr>
               <a:t>Small enough that you cannot talk yourself out of it.</a:t>
             </a:r>
@@ -11281,11 +10489,11 @@
               </a:spcAft>
             </a:pPr>
             <a:r>
-              <a:rPr sz="1400" b="1" i="0">
+              <a:rPr sz="1400" b="0" i="0">
                 <a:solidFill>
                   <a:srgbClr val="8A6512"/>
                 </a:solidFill>
-                <a:latin typeface="Libre Caslon Display"/>
+                <a:latin typeface="Georgia"/>
               </a:rPr>
               <a:t>When</a:t>
             </a:r>
@@ -11327,7 +10535,7 @@
                 <a:solidFill>
                   <a:srgbClr val="706750"/>
                 </a:solidFill>
-                <a:latin typeface="Karla"/>
+                <a:latin typeface="Calibri"/>
               </a:rPr>
               <a:t>A time today or tomorrow. Not “soon”.</a:t>
             </a:r>
@@ -11369,7 +10577,7 @@
                 <a:solidFill>
                   <a:srgbClr val="8A6512"/>
                 </a:solidFill>
-                <a:latin typeface="Karla"/>
+                <a:latin typeface="Calibri"/>
               </a:rPr>
               <a:t>Put it somewhere you will see it before the time you have written down.</a:t>
             </a:r>
@@ -11435,7 +10643,7 @@
                 <a:solidFill>
                   <a:srgbClr val="A29A80"/>
                 </a:solidFill>
-                <a:latin typeface="Karla"/>
+                <a:latin typeface="Calibri"/>
               </a:rPr>
               <a:t>The Pastoral Guide</a:t>
             </a:r>
@@ -11477,7 +10685,7 @@
                 <a:solidFill>
                   <a:srgbClr val="A29A80"/>
                 </a:solidFill>
-                <a:latin typeface="Karla"/>
+                <a:latin typeface="Calibri"/>
               </a:rPr>
               <a:t>18 / 20</a:t>
             </a:r>
@@ -11581,7 +10789,7 @@
                 <a:solidFill>
                   <a:srgbClr val="4A4028"/>
                 </a:solidFill>
-                <a:latin typeface="Karla"/>
+                <a:latin typeface="Calibri"/>
               </a:rPr>
               <a:t>IF YOU REMEMBER ONE THING</a:t>
             </a:r>
@@ -11619,21 +10827,21 @@
               </a:spcAft>
             </a:pPr>
             <a:r>
-              <a:rPr sz="3400" b="1" i="0">
+              <a:rPr sz="3400" b="0" i="0">
                 <a:solidFill>
                   <a:srgbClr val="3A3320"/>
                 </a:solidFill>
-                <a:latin typeface="Libre Caslon Display"/>
+                <a:latin typeface="Georgia"/>
               </a:rPr>
               <a:t>You are not going to feel like it.</a:t>
             </a:r>
             <a:br/>
             <a:r>
-              <a:rPr sz="3400" b="1" i="0">
+              <a:rPr sz="3400" b="0" i="0">
                 <a:solidFill>
                   <a:srgbClr val="3A3320"/>
                 </a:solidFill>
-                <a:latin typeface="Libre Caslon Display"/>
+                <a:latin typeface="Georgia"/>
               </a:rPr>
               <a:t>Start anyway.</a:t>
             </a:r>
@@ -11719,7 +10927,7 @@
                 <a:solidFill>
                   <a:srgbClr val="4A4028"/>
                 </a:solidFill>
-                <a:latin typeface="Karla"/>
+                <a:latin typeface="Calibri"/>
               </a:rPr>
               <a:t>Nobody feels like it first.</a:t>
             </a:r>
@@ -11729,7 +10937,7 @@
                 <a:solidFill>
                   <a:srgbClr val="4A4028"/>
                 </a:solidFill>
-                <a:latin typeface="Karla"/>
+                <a:latin typeface="Calibri"/>
               </a:rPr>
               <a:t>The wanting to turns up afterwards, once you have moved.</a:t>
             </a:r>
@@ -11795,7 +11003,7 @@
                 <a:solidFill>
                   <a:srgbClr val="4A4028"/>
                 </a:solidFill>
-                <a:latin typeface="Karla"/>
+                <a:latin typeface="Calibri"/>
               </a:rPr>
               <a:t>The Pastoral Guide</a:t>
             </a:r>
@@ -11837,7 +11045,7 @@
                 <a:solidFill>
                   <a:srgbClr val="4A4028"/>
                 </a:solidFill>
-                <a:latin typeface="Karla"/>
+                <a:latin typeface="Calibri"/>
               </a:rPr>
               <a:t>19 / 20</a:t>
             </a:r>
@@ -11987,7 +11195,7 @@
                 <a:solidFill>
                   <a:srgbClr val="8A6512"/>
                 </a:solidFill>
-                <a:latin typeface="Karla"/>
+                <a:latin typeface="Calibri"/>
               </a:rPr>
               <a:t>TEACHER SLIDE  ·  SKIP IT</a:t>
             </a:r>
@@ -12029,7 +11237,7 @@
                 <a:solidFill>
                   <a:srgbClr val="8A6512"/>
                 </a:solidFill>
-                <a:latin typeface="Karla"/>
+                <a:latin typeface="Calibri"/>
               </a:rPr>
               <a:t>BEFORE YOU START</a:t>
             </a:r>
@@ -12067,11 +11275,11 @@
               </a:spcAft>
             </a:pPr>
             <a:r>
-              <a:rPr sz="3100" b="1" i="0">
+              <a:rPr sz="3100" b="0" i="0">
                 <a:solidFill>
                   <a:srgbClr val="3F3826"/>
                 </a:solidFill>
-                <a:latin typeface="Libre Caslon Display"/>
+                <a:latin typeface="Georgia"/>
               </a:rPr>
               <a:t>Six things, in this order</a:t>
             </a:r>
@@ -12201,11 +11409,11 @@
               </a:spcAft>
             </a:pPr>
             <a:r>
-              <a:rPr sz="1300" b="1" i="0">
+              <a:rPr sz="1300" b="0" i="0">
                 <a:solidFill>
                   <a:srgbClr val="FFFDF7"/>
                 </a:solidFill>
-                <a:latin typeface="Libre Caslon Display"/>
+                <a:latin typeface="Georgia"/>
               </a:rPr>
               <a:t>1</a:t>
             </a:r>
@@ -12243,11 +11451,11 @@
               </a:spcAft>
             </a:pPr>
             <a:r>
-              <a:rPr sz="1500" b="1" i="0">
+              <a:rPr sz="1500" b="0" i="0">
                 <a:solidFill>
                   <a:srgbClr val="8A6512"/>
                 </a:solidFill>
-                <a:latin typeface="Libre Caslon Display"/>
+                <a:latin typeface="Georgia"/>
               </a:rPr>
               <a:t>Remember</a:t>
             </a:r>
@@ -12289,7 +11497,7 @@
                 <a:solidFill>
                   <a:srgbClr val="706750"/>
                 </a:solidFill>
-                <a:latin typeface="Karla"/>
+                <a:latin typeface="Calibri"/>
               </a:rPr>
               <a:t>A time you felt motivated, and what set it off</a:t>
             </a:r>
@@ -12419,11 +11627,11 @@
               </a:spcAft>
             </a:pPr>
             <a:r>
-              <a:rPr sz="1300" b="1" i="0">
+              <a:rPr sz="1300" b="0" i="0">
                 <a:solidFill>
                   <a:srgbClr val="FFFDF7"/>
                 </a:solidFill>
-                <a:latin typeface="Libre Caslon Display"/>
+                <a:latin typeface="Georgia"/>
               </a:rPr>
               <a:t>2</a:t>
             </a:r>
@@ -12461,11 +11669,11 @@
               </a:spcAft>
             </a:pPr>
             <a:r>
-              <a:rPr sz="1500" b="1" i="0">
+              <a:rPr sz="1500" b="0" i="0">
                 <a:solidFill>
                   <a:srgbClr val="8A6512"/>
                 </a:solidFill>
-                <a:latin typeface="Libre Caslon Display"/>
+                <a:latin typeface="Georgia"/>
               </a:rPr>
               <a:t>Notice</a:t>
             </a:r>
@@ -12507,7 +11715,7 @@
                 <a:solidFill>
                   <a:srgbClr val="706750"/>
                 </a:solidFill>
-                <a:latin typeface="Karla"/>
+                <a:latin typeface="Calibri"/>
               </a:rPr>
               <a:t>Every trigger the room named had already happened</a:t>
             </a:r>
@@ -12637,11 +11845,11 @@
               </a:spcAft>
             </a:pPr>
             <a:r>
-              <a:rPr sz="1300" b="1" i="0">
+              <a:rPr sz="1300" b="0" i="0">
                 <a:solidFill>
                   <a:srgbClr val="FFFDF7"/>
                 </a:solidFill>
-                <a:latin typeface="Libre Caslon Display"/>
+                <a:latin typeface="Georgia"/>
               </a:rPr>
               <a:t>3</a:t>
             </a:r>
@@ -12679,11 +11887,11 @@
               </a:spcAft>
             </a:pPr>
             <a:r>
-              <a:rPr sz="1500" b="1" i="0">
+              <a:rPr sz="1500" b="0" i="0">
                 <a:solidFill>
                   <a:srgbClr val="8A6512"/>
                 </a:solidFill>
-                <a:latin typeface="Libre Caslon Display"/>
+                <a:latin typeface="Georgia"/>
               </a:rPr>
               <a:t>Learn</a:t>
             </a:r>
@@ -12725,7 +11933,7 @@
                 <a:solidFill>
                   <a:srgbClr val="706750"/>
                 </a:solidFill>
-                <a:latin typeface="Karla"/>
+                <a:latin typeface="Calibri"/>
               </a:rPr>
               <a:t>Action comes first. Motivation follows it</a:t>
             </a:r>
@@ -12855,11 +12063,11 @@
               </a:spcAft>
             </a:pPr>
             <a:r>
-              <a:rPr sz="1300" b="1" i="0">
+              <a:rPr sz="1300" b="0" i="0">
                 <a:solidFill>
                   <a:srgbClr val="FFFDF7"/>
                 </a:solidFill>
-                <a:latin typeface="Libre Caslon Display"/>
+                <a:latin typeface="Georgia"/>
               </a:rPr>
               <a:t>4</a:t>
             </a:r>
@@ -12897,11 +12105,11 @@
               </a:spcAft>
             </a:pPr>
             <a:r>
-              <a:rPr sz="1500" b="1" i="0">
+              <a:rPr sz="1500" b="0" i="0">
                 <a:solidFill>
                   <a:srgbClr val="8A6512"/>
                 </a:solidFill>
-                <a:latin typeface="Libre Caslon Display"/>
+                <a:latin typeface="Georgia"/>
               </a:rPr>
               <a:t>Shrink</a:t>
             </a:r>
@@ -12943,7 +12151,7 @@
                 <a:solidFill>
                   <a:srgbClr val="706750"/>
                 </a:solidFill>
-                <a:latin typeface="Karla"/>
+                <a:latin typeface="Calibri"/>
               </a:rPr>
               <a:t>Cut one task down until it is too small to avoid</a:t>
             </a:r>
@@ -13073,11 +12281,11 @@
               </a:spcAft>
             </a:pPr>
             <a:r>
-              <a:rPr sz="1300" b="1" i="0">
+              <a:rPr sz="1300" b="0" i="0">
                 <a:solidFill>
                   <a:srgbClr val="FFFDF7"/>
                 </a:solidFill>
-                <a:latin typeface="Libre Caslon Display"/>
+                <a:latin typeface="Georgia"/>
               </a:rPr>
               <a:t>5</a:t>
             </a:r>
@@ -13115,11 +12323,11 @@
               </a:spcAft>
             </a:pPr>
             <a:r>
-              <a:rPr sz="1500" b="1" i="0">
+              <a:rPr sz="1500" b="0" i="0">
                 <a:solidFill>
                   <a:srgbClr val="8A6512"/>
                 </a:solidFill>
-                <a:latin typeface="Libre Caslon Display"/>
+                <a:latin typeface="Georgia"/>
               </a:rPr>
               <a:t>Do</a:t>
             </a:r>
@@ -13161,7 +12369,7 @@
                 <a:solidFill>
                   <a:srgbClr val="706750"/>
                 </a:solidFill>
-                <a:latin typeface="Karla"/>
+                <a:latin typeface="Calibri"/>
               </a:rPr>
               <a:t>Five minutes, in silence, right now</a:t>
             </a:r>
@@ -13291,11 +12499,11 @@
               </a:spcAft>
             </a:pPr>
             <a:r>
-              <a:rPr sz="1300" b="1" i="0">
+              <a:rPr sz="1300" b="0" i="0">
                 <a:solidFill>
                   <a:srgbClr val="FFFDF7"/>
                 </a:solidFill>
-                <a:latin typeface="Libre Caslon Display"/>
+                <a:latin typeface="Georgia"/>
               </a:rPr>
               <a:t>6</a:t>
             </a:r>
@@ -13333,11 +12541,11 @@
               </a:spcAft>
             </a:pPr>
             <a:r>
-              <a:rPr sz="1500" b="1" i="0">
+              <a:rPr sz="1500" b="0" i="0">
                 <a:solidFill>
                   <a:srgbClr val="8A6512"/>
                 </a:solidFill>
-                <a:latin typeface="Libre Caslon Display"/>
+                <a:latin typeface="Georgia"/>
               </a:rPr>
               <a:t>Weigh</a:t>
             </a:r>
@@ -13379,7 +12587,7 @@
                 <a:solidFill>
                   <a:srgbClr val="706750"/>
                 </a:solidFill>
-                <a:latin typeface="Karla"/>
+                <a:latin typeface="Calibri"/>
               </a:rPr>
               <a:t>Busy is not the same as moving forward</a:t>
             </a:r>
@@ -13421,7 +12629,7 @@
                 <a:solidFill>
                   <a:srgbClr val="8A6512"/>
                 </a:solidFill>
-                <a:latin typeface="Karla"/>
+                <a:latin typeface="Calibri"/>
               </a:rPr>
               <a:t>Nothing written down in this lesson is collected, read out or marked.</a:t>
             </a:r>
@@ -13487,7 +12695,7 @@
                 <a:solidFill>
                   <a:srgbClr val="A29A80"/>
                 </a:solidFill>
-                <a:latin typeface="Karla"/>
+                <a:latin typeface="Calibri"/>
               </a:rPr>
               <a:t>The Pastoral Guide</a:t>
             </a:r>
@@ -13529,7 +12737,7 @@
                 <a:solidFill>
                   <a:srgbClr val="A29A80"/>
                 </a:solidFill>
-                <a:latin typeface="Karla"/>
+                <a:latin typeface="Calibri"/>
               </a:rPr>
               <a:t>2 / 20</a:t>
             </a:r>
@@ -13653,11 +12861,11 @@
               </a:spcAft>
             </a:pPr>
             <a:r>
-              <a:rPr sz="3000" b="1" i="0">
+              <a:rPr sz="3000" b="0" i="0">
                 <a:solidFill>
                   <a:srgbClr val="3A3320"/>
                 </a:solidFill>
-                <a:latin typeface="Libre Caslon Display"/>
+                <a:latin typeface="Georgia"/>
               </a:rPr>
               <a:t>Go and do the five-minute version.</a:t>
             </a:r>
@@ -13699,7 +12907,7 @@
                 <a:solidFill>
                   <a:srgbClr val="4A4028"/>
                 </a:solidFill>
-                <a:latin typeface="Karla"/>
+                <a:latin typeface="Calibri"/>
               </a:rPr>
               <a:t>Not the whole thing. Nobody does the whole thing first.</a:t>
             </a:r>
@@ -13709,7 +12917,7 @@
                 <a:solidFill>
                   <a:srgbClr val="4A4028"/>
                 </a:solidFill>
-                <a:latin typeface="Karla"/>
+                <a:latin typeface="Calibri"/>
               </a:rPr>
               <a:t>Just the bit that gets you moving.</a:t>
             </a:r>
@@ -13751,7 +12959,7 @@
                 <a:solidFill>
                   <a:srgbClr val="4A4028"/>
                 </a:solidFill>
-                <a:latin typeface="Karla"/>
+                <a:latin typeface="Calibri"/>
               </a:rPr>
               <a:t>Motivation Comes Second  ·  A procrastination lesson</a:t>
             </a:r>
@@ -13817,7 +13025,7 @@
                 <a:solidFill>
                   <a:srgbClr val="4A4028"/>
                 </a:solidFill>
-                <a:latin typeface="Karla"/>
+                <a:latin typeface="Calibri"/>
               </a:rPr>
               <a:t>The Pastoral Guide</a:t>
             </a:r>
@@ -13859,7 +13067,7 @@
                 <a:solidFill>
                   <a:srgbClr val="4A4028"/>
                 </a:solidFill>
-                <a:latin typeface="Karla"/>
+                <a:latin typeface="Calibri"/>
               </a:rPr>
               <a:t>20 / 20</a:t>
             </a:r>
@@ -13963,97 +13171,9 @@
                 <a:solidFill>
                   <a:srgbClr val="4A4028"/>
                 </a:solidFill>
-                <a:latin typeface="Karla"/>
+                <a:latin typeface="Calibri"/>
               </a:rPr>
               <a:t>START HERE</a:t>
-            </a:r>
-          </a:p>
-        </p:txBody>
-      </p:sp>
-      <p:sp>
-        <p:nvSpPr>
-          <p:cNvPr id="4" name="Rounded Rectangle 3"/>
-          <p:cNvSpPr/>
-          <p:nvPr/>
-        </p:nvSpPr>
-        <p:spPr>
-          <a:xfrm>
-            <a:off x="7086600" y="530352"/>
-            <a:ext cx="1371600" cy="347472"/>
-          </a:xfrm>
-          <a:prstGeom prst="roundRect">
-            <a:avLst>
-              <a:gd name="adj" fmla="val 50000"/>
-            </a:avLst>
-          </a:prstGeom>
-          <a:solidFill>
-            <a:srgbClr val="FFFFFF"/>
-          </a:solidFill>
-          <a:ln>
-            <a:noFill/>
-          </a:ln>
-          <a:effectLst/>
-        </p:spPr>
-        <p:style>
-          <a:lnRef idx="1">
-            <a:schemeClr val="accent1"/>
-          </a:lnRef>
-          <a:fillRef idx="3">
-            <a:schemeClr val="accent1"/>
-          </a:fillRef>
-          <a:effectRef idx="2">
-            <a:schemeClr val="accent1"/>
-          </a:effectRef>
-          <a:fontRef idx="minor">
-            <a:schemeClr val="lt1"/>
-          </a:fontRef>
-        </p:style>
-        <p:txBody>
-          <a:bodyPr rtlCol="0" anchor="ctr"/>
-          <a:lstStyle/>
-          <a:p>
-            <a:pPr algn="ctr"/>
-          </a:p>
-        </p:txBody>
-      </p:sp>
-      <p:sp>
-        <p:nvSpPr>
-          <p:cNvPr id="5" name="TextBox 4"/>
-          <p:cNvSpPr txBox="1"/>
-          <p:nvPr/>
-        </p:nvSpPr>
-        <p:spPr>
-          <a:xfrm>
-            <a:off x="7086600" y="589788"/>
-            <a:ext cx="1371600" cy="237744"/>
-          </a:xfrm>
-          <a:prstGeom prst="rect">
-            <a:avLst/>
-          </a:prstGeom>
-          <a:noFill/>
-        </p:spPr>
-        <p:txBody>
-          <a:bodyPr wrap="square" lIns="0" rIns="0" tIns="0" bIns="0" anchor="t">
-            <a:spAutoFit/>
-          </a:bodyPr>
-          <a:lstStyle/>
-          <a:p>
-            <a:pPr algn="ctr">
-              <a:lnSpc>
-                <a:spcPct val="125000"/>
-              </a:lnSpc>
-              <a:spcAft>
-                <a:spcPts val="0"/>
-              </a:spcAft>
-            </a:pPr>
-            <a:r>
-              <a:rPr sz="1000" b="1" i="0" spc="100">
-                <a:solidFill>
-                  <a:srgbClr val="8A6512"/>
-                </a:solidFill>
-                <a:latin typeface="Karla"/>
-              </a:rPr>
-              <a:t>REFLECT</a:t>
             </a:r>
           </a:p>
         </p:txBody>
@@ -14089,21 +13209,21 @@
               </a:spcAft>
             </a:pPr>
             <a:r>
-              <a:rPr sz="3800" b="1" i="0">
+              <a:rPr sz="3800" b="0" i="0">
                 <a:solidFill>
                   <a:srgbClr val="3A3320"/>
                 </a:solidFill>
-                <a:latin typeface="Libre Caslon Display"/>
+                <a:latin typeface="Georgia"/>
               </a:rPr>
               <a:t>When did you last really</a:t>
             </a:r>
             <a:br/>
             <a:r>
-              <a:rPr sz="3800" b="1" i="0">
+              <a:rPr sz="3800" b="0" i="0">
                 <a:solidFill>
                   <a:srgbClr val="3A3320"/>
                 </a:solidFill>
-                <a:latin typeface="Libre Caslon Display"/>
+                <a:latin typeface="Georgia"/>
               </a:rPr>
               <a:t>want to do something?</a:t>
             </a:r>
@@ -14145,7 +13265,7 @@
                 <a:solidFill>
                   <a:srgbClr val="4A4028"/>
                 </a:solidFill>
-                <a:latin typeface="Karla"/>
+                <a:latin typeface="Calibri"/>
               </a:rPr>
               <a:t>Anything at all. It does not have to be school.</a:t>
             </a:r>
@@ -14235,7 +13355,7 @@
                 <a:solidFill>
                   <a:srgbClr val="8A6512"/>
                 </a:solidFill>
-                <a:latin typeface="Karla"/>
+                <a:latin typeface="Calibri"/>
               </a:rPr>
               <a:t>What was it, and when?</a:t>
             </a:r>
@@ -14325,7 +13445,7 @@
                 <a:solidFill>
                   <a:srgbClr val="8A6512"/>
                 </a:solidFill>
-                <a:latin typeface="Karla"/>
+                <a:latin typeface="Calibri"/>
               </a:rPr>
               <a:t>What were you doing in the hour before it?</a:t>
             </a:r>
@@ -14415,7 +13535,7 @@
                 <a:solidFill>
                   <a:srgbClr val="8A6512"/>
                 </a:solidFill>
-                <a:latin typeface="Karla"/>
+                <a:latin typeface="Calibri"/>
               </a:rPr>
               <a:t>What set it off?</a:t>
             </a:r>
@@ -14481,7 +13601,7 @@
                 <a:solidFill>
                   <a:srgbClr val="4A4028"/>
                 </a:solidFill>
-                <a:latin typeface="Karla"/>
+                <a:latin typeface="Calibri"/>
               </a:rPr>
               <a:t>The Pastoral Guide</a:t>
             </a:r>
@@ -14523,7 +13643,7 @@
                 <a:solidFill>
                   <a:srgbClr val="4A4028"/>
                 </a:solidFill>
-                <a:latin typeface="Karla"/>
+                <a:latin typeface="Calibri"/>
               </a:rPr>
               <a:t>3 / 20</a:t>
             </a:r>
@@ -14627,97 +13747,9 @@
                 <a:solidFill>
                   <a:srgbClr val="8A6512"/>
                 </a:solidFill>
-                <a:latin typeface="Karla"/>
+                <a:latin typeface="Calibri"/>
               </a:rPr>
               <a:t>THIRD QUESTION ONLY</a:t>
-            </a:r>
-          </a:p>
-        </p:txBody>
-      </p:sp>
-      <p:sp>
-        <p:nvSpPr>
-          <p:cNvPr id="4" name="Rounded Rectangle 3"/>
-          <p:cNvSpPr/>
-          <p:nvPr/>
-        </p:nvSpPr>
-        <p:spPr>
-          <a:xfrm>
-            <a:off x="7086600" y="530352"/>
-            <a:ext cx="1371600" cy="347472"/>
-          </a:xfrm>
-          <a:prstGeom prst="roundRect">
-            <a:avLst>
-              <a:gd name="adj" fmla="val 50000"/>
-            </a:avLst>
-          </a:prstGeom>
-          <a:solidFill>
-            <a:srgbClr val="FAF1DE"/>
-          </a:solidFill>
-          <a:ln>
-            <a:noFill/>
-          </a:ln>
-          <a:effectLst/>
-        </p:spPr>
-        <p:style>
-          <a:lnRef idx="1">
-            <a:schemeClr val="accent1"/>
-          </a:lnRef>
-          <a:fillRef idx="3">
-            <a:schemeClr val="accent1"/>
-          </a:fillRef>
-          <a:effectRef idx="2">
-            <a:schemeClr val="accent1"/>
-          </a:effectRef>
-          <a:fontRef idx="minor">
-            <a:schemeClr val="lt1"/>
-          </a:fontRef>
-        </p:style>
-        <p:txBody>
-          <a:bodyPr rtlCol="0" anchor="ctr"/>
-          <a:lstStyle/>
-          <a:p>
-            <a:pPr algn="ctr"/>
-          </a:p>
-        </p:txBody>
-      </p:sp>
-      <p:sp>
-        <p:nvSpPr>
-          <p:cNvPr id="5" name="TextBox 4"/>
-          <p:cNvSpPr txBox="1"/>
-          <p:nvPr/>
-        </p:nvSpPr>
-        <p:spPr>
-          <a:xfrm>
-            <a:off x="7086600" y="589788"/>
-            <a:ext cx="1371600" cy="237744"/>
-          </a:xfrm>
-          <a:prstGeom prst="rect">
-            <a:avLst/>
-          </a:prstGeom>
-          <a:noFill/>
-        </p:spPr>
-        <p:txBody>
-          <a:bodyPr wrap="square" lIns="0" rIns="0" tIns="0" bIns="0" anchor="t">
-            <a:spAutoFit/>
-          </a:bodyPr>
-          <a:lstStyle/>
-          <a:p>
-            <a:pPr algn="ctr">
-              <a:lnSpc>
-                <a:spcPct val="125000"/>
-              </a:lnSpc>
-              <a:spcAft>
-                <a:spcPts val="0"/>
-              </a:spcAft>
-            </a:pPr>
-            <a:r>
-              <a:rPr sz="1000" b="1" i="0" spc="100">
-                <a:solidFill>
-                  <a:srgbClr val="8A6512"/>
-                </a:solidFill>
-                <a:latin typeface="Karla"/>
-              </a:rPr>
-              <a:t>SAY IT</a:t>
             </a:r>
           </a:p>
         </p:txBody>
@@ -14753,11 +13785,11 @@
               </a:spcAft>
             </a:pPr>
             <a:r>
-              <a:rPr sz="3200" b="1" i="0">
+              <a:rPr sz="3200" b="0" i="0">
                 <a:solidFill>
                   <a:srgbClr val="3F3826"/>
                 </a:solidFill>
-                <a:latin typeface="Libre Caslon Display"/>
+                <a:latin typeface="Georgia"/>
               </a:rPr>
               <a:t>What set it off?</a:t>
             </a:r>
@@ -14799,7 +13831,7 @@
                 <a:solidFill>
                   <a:srgbClr val="706750"/>
                 </a:solidFill>
-                <a:latin typeface="Karla"/>
+                <a:latin typeface="Calibri"/>
               </a:rPr>
               <a:t>Say them out loud. Every one goes on the board.</a:t>
             </a:r>
@@ -14885,21 +13917,21 @@
               </a:spcAft>
             </a:pPr>
             <a:r>
-              <a:rPr sz="1900" b="1" i="0">
+              <a:rPr sz="1787" b="0" i="0">
                 <a:solidFill>
                   <a:srgbClr val="8A6512"/>
                 </a:solidFill>
-                <a:latin typeface="Libre Caslon Display"/>
+                <a:latin typeface="Georgia"/>
               </a:rPr>
               <a:t>There are no wrong answers here,</a:t>
             </a:r>
             <a:br/>
             <a:r>
-              <a:rPr sz="1900" b="1" i="0">
+              <a:rPr sz="1787" b="0" i="0">
                 <a:solidFill>
                   <a:srgbClr val="8A6512"/>
                 </a:solidFill>
-                <a:latin typeface="Libre Caslon Display"/>
+                <a:latin typeface="Georgia"/>
               </a:rPr>
               <a:t>and we need a lot of them.</a:t>
             </a:r>
@@ -14941,7 +13973,7 @@
                 <a:solidFill>
                   <a:srgbClr val="706750"/>
                 </a:solidFill>
-                <a:latin typeface="Karla"/>
+                <a:latin typeface="Calibri"/>
               </a:rPr>
               <a:t>Nothing on the board gets judged. We are looking for a pattern.</a:t>
             </a:r>
@@ -15007,7 +14039,7 @@
                 <a:solidFill>
                   <a:srgbClr val="A29A80"/>
                 </a:solidFill>
-                <a:latin typeface="Karla"/>
+                <a:latin typeface="Calibri"/>
               </a:rPr>
               <a:t>The Pastoral Guide</a:t>
             </a:r>
@@ -15049,7 +14081,7 @@
                 <a:solidFill>
                   <a:srgbClr val="A29A80"/>
                 </a:solidFill>
-                <a:latin typeface="Karla"/>
+                <a:latin typeface="Calibri"/>
               </a:rPr>
               <a:t>4 / 20</a:t>
             </a:r>
@@ -15153,97 +14185,9 @@
                 <a:solidFill>
                   <a:srgbClr val="8A6512"/>
                 </a:solidFill>
-                <a:latin typeface="Karla"/>
+                <a:latin typeface="Calibri"/>
               </a:rPr>
               <a:t>NOW LOOK AT THE BOARD</a:t>
-            </a:r>
-          </a:p>
-        </p:txBody>
-      </p:sp>
-      <p:sp>
-        <p:nvSpPr>
-          <p:cNvPr id="4" name="Rounded Rectangle 3"/>
-          <p:cNvSpPr/>
-          <p:nvPr/>
-        </p:nvSpPr>
-        <p:spPr>
-          <a:xfrm>
-            <a:off x="7059168" y="530352"/>
-            <a:ext cx="1399032" cy="347472"/>
-          </a:xfrm>
-          <a:prstGeom prst="roundRect">
-            <a:avLst>
-              <a:gd name="adj" fmla="val 50000"/>
-            </a:avLst>
-          </a:prstGeom>
-          <a:solidFill>
-            <a:srgbClr val="FAF1DE"/>
-          </a:solidFill>
-          <a:ln>
-            <a:noFill/>
-          </a:ln>
-          <a:effectLst/>
-        </p:spPr>
-        <p:style>
-          <a:lnRef idx="1">
-            <a:schemeClr val="accent1"/>
-          </a:lnRef>
-          <a:fillRef idx="3">
-            <a:schemeClr val="accent1"/>
-          </a:fillRef>
-          <a:effectRef idx="2">
-            <a:schemeClr val="accent1"/>
-          </a:effectRef>
-          <a:fontRef idx="minor">
-            <a:schemeClr val="lt1"/>
-          </a:fontRef>
-        </p:style>
-        <p:txBody>
-          <a:bodyPr rtlCol="0" anchor="ctr"/>
-          <a:lstStyle/>
-          <a:p>
-            <a:pPr algn="ctr"/>
-          </a:p>
-        </p:txBody>
-      </p:sp>
-      <p:sp>
-        <p:nvSpPr>
-          <p:cNvPr id="5" name="TextBox 4"/>
-          <p:cNvSpPr txBox="1"/>
-          <p:nvPr/>
-        </p:nvSpPr>
-        <p:spPr>
-          <a:xfrm>
-            <a:off x="7059168" y="589788"/>
-            <a:ext cx="1399032" cy="237744"/>
-          </a:xfrm>
-          <a:prstGeom prst="rect">
-            <a:avLst/>
-          </a:prstGeom>
-          <a:noFill/>
-        </p:spPr>
-        <p:txBody>
-          <a:bodyPr wrap="square" lIns="0" rIns="0" tIns="0" bIns="0" anchor="t">
-            <a:spAutoFit/>
-          </a:bodyPr>
-          <a:lstStyle/>
-          <a:p>
-            <a:pPr algn="ctr">
-              <a:lnSpc>
-                <a:spcPct val="125000"/>
-              </a:lnSpc>
-              <a:spcAft>
-                <a:spcPts val="0"/>
-              </a:spcAft>
-            </a:pPr>
-            <a:r>
-              <a:rPr sz="1000" b="1" i="0" spc="100">
-                <a:solidFill>
-                  <a:srgbClr val="8A6512"/>
-                </a:solidFill>
-                <a:latin typeface="Karla"/>
-              </a:rPr>
-              <a:t>FEEDBACK</a:t>
             </a:r>
           </a:p>
         </p:txBody>
@@ -15279,11 +14223,11 @@
               </a:spcAft>
             </a:pPr>
             <a:r>
-              <a:rPr sz="2700" b="1" i="0">
+              <a:rPr sz="2700" b="0" i="0">
                 <a:solidFill>
                   <a:srgbClr val="3F3826"/>
                 </a:solidFill>
-                <a:latin typeface="Libre Caslon Display"/>
+                <a:latin typeface="Georgia"/>
               </a:rPr>
               <a:t>What have they got in common?</a:t>
             </a:r>
@@ -15325,7 +14269,7 @@
                 <a:solidFill>
                   <a:srgbClr val="706750"/>
                 </a:solidFill>
-                <a:latin typeface="Karla"/>
+                <a:latin typeface="Calibri"/>
               </a:rPr>
               <a:t>Most classes end up with some of these.</a:t>
             </a:r>
@@ -15411,11 +14355,11 @@
               </a:spcAft>
             </a:pPr>
             <a:r>
-              <a:rPr sz="1200" b="1" i="0">
+              <a:rPr sz="1200" b="0" i="0">
                 <a:solidFill>
                   <a:srgbClr val="3F3826"/>
                 </a:solidFill>
-                <a:latin typeface="Libre Caslon Display"/>
+                <a:latin typeface="Georgia"/>
               </a:rPr>
               <a:t>A deadline got close</a:t>
             </a:r>
@@ -15501,11 +14445,11 @@
               </a:spcAft>
             </a:pPr>
             <a:r>
-              <a:rPr sz="1200" b="1" i="0">
+              <a:rPr sz="1200" b="0" i="0">
                 <a:solidFill>
                   <a:srgbClr val="3F3826"/>
                 </a:solidFill>
-                <a:latin typeface="Libre Caslon Display"/>
+                <a:latin typeface="Georgia"/>
               </a:rPr>
               <a:t>Somebody else started</a:t>
             </a:r>
@@ -15591,11 +14535,11 @@
               </a:spcAft>
             </a:pPr>
             <a:r>
-              <a:rPr sz="1200" b="1" i="0">
+              <a:rPr sz="1200" b="0" i="0">
                 <a:solidFill>
                   <a:srgbClr val="3F3826"/>
                 </a:solidFill>
-                <a:latin typeface="Libre Caslon Display"/>
+                <a:latin typeface="Georgia"/>
               </a:rPr>
               <a:t>A mark came back</a:t>
             </a:r>
@@ -15681,11 +14625,11 @@
               </a:spcAft>
             </a:pPr>
             <a:r>
-              <a:rPr sz="1200" b="1" i="0">
+              <a:rPr sz="1200" b="0" i="0">
                 <a:solidFill>
                   <a:srgbClr val="3F3826"/>
                 </a:solidFill>
-                <a:latin typeface="Libre Caslon Display"/>
+                <a:latin typeface="Georgia"/>
               </a:rPr>
               <a:t>I had already done a bit</a:t>
             </a:r>
@@ -15771,11 +14715,11 @@
               </a:spcAft>
             </a:pPr>
             <a:r>
-              <a:rPr sz="1200" b="1" i="0">
+              <a:rPr sz="1200" b="0" i="0">
                 <a:solidFill>
                   <a:srgbClr val="3F3826"/>
                 </a:solidFill>
-                <a:latin typeface="Libre Caslon Display"/>
+                <a:latin typeface="Georgia"/>
               </a:rPr>
               <a:t>Something finally worked</a:t>
             </a:r>
@@ -15861,11 +14805,11 @@
               </a:spcAft>
             </a:pPr>
             <a:r>
-              <a:rPr sz="1200" b="1" i="0">
+              <a:rPr sz="1200" b="0" i="0">
                 <a:solidFill>
                   <a:srgbClr val="3F3826"/>
                 </a:solidFill>
-                <a:latin typeface="Libre Caslon Display"/>
+                <a:latin typeface="Georgia"/>
               </a:rPr>
               <a:t>Someone needed me to</a:t>
             </a:r>
@@ -15907,7 +14851,7 @@
                 <a:solidFill>
                   <a:srgbClr val="8A6512"/>
                 </a:solidFill>
-                <a:latin typeface="Karla"/>
+                <a:latin typeface="Calibri"/>
               </a:rPr>
               <a:t>Every single one had already happened before the motivation arrived.</a:t>
             </a:r>
@@ -15973,7 +14917,7 @@
                 <a:solidFill>
                   <a:srgbClr val="A29A80"/>
                 </a:solidFill>
-                <a:latin typeface="Karla"/>
+                <a:latin typeface="Calibri"/>
               </a:rPr>
               <a:t>The Pastoral Guide</a:t>
             </a:r>
@@ -16015,7 +14959,7 @@
                 <a:solidFill>
                   <a:srgbClr val="A29A80"/>
                 </a:solidFill>
-                <a:latin typeface="Karla"/>
+                <a:latin typeface="Calibri"/>
               </a:rPr>
               <a:t>5 / 20</a:t>
             </a:r>
@@ -16119,97 +15063,9 @@
                 <a:solidFill>
                   <a:srgbClr val="4A4028"/>
                 </a:solidFill>
-                <a:latin typeface="Karla"/>
+                <a:latin typeface="Calibri"/>
               </a:rPr>
               <a:t>WHICH MEANS</a:t>
-            </a:r>
-          </a:p>
-        </p:txBody>
-      </p:sp>
-      <p:sp>
-        <p:nvSpPr>
-          <p:cNvPr id="4" name="Rounded Rectangle 3"/>
-          <p:cNvSpPr/>
-          <p:nvPr/>
-        </p:nvSpPr>
-        <p:spPr>
-          <a:xfrm>
-            <a:off x="7059168" y="530352"/>
-            <a:ext cx="1399032" cy="347472"/>
-          </a:xfrm>
-          <a:prstGeom prst="roundRect">
-            <a:avLst>
-              <a:gd name="adj" fmla="val 50000"/>
-            </a:avLst>
-          </a:prstGeom>
-          <a:solidFill>
-            <a:srgbClr val="FFFFFF"/>
-          </a:solidFill>
-          <a:ln>
-            <a:noFill/>
-          </a:ln>
-          <a:effectLst/>
-        </p:spPr>
-        <p:style>
-          <a:lnRef idx="1">
-            <a:schemeClr val="accent1"/>
-          </a:lnRef>
-          <a:fillRef idx="3">
-            <a:schemeClr val="accent1"/>
-          </a:fillRef>
-          <a:effectRef idx="2">
-            <a:schemeClr val="accent1"/>
-          </a:effectRef>
-          <a:fontRef idx="minor">
-            <a:schemeClr val="lt1"/>
-          </a:fontRef>
-        </p:style>
-        <p:txBody>
-          <a:bodyPr rtlCol="0" anchor="ctr"/>
-          <a:lstStyle/>
-          <a:p>
-            <a:pPr algn="ctr"/>
-          </a:p>
-        </p:txBody>
-      </p:sp>
-      <p:sp>
-        <p:nvSpPr>
-          <p:cNvPr id="5" name="TextBox 4"/>
-          <p:cNvSpPr txBox="1"/>
-          <p:nvPr/>
-        </p:nvSpPr>
-        <p:spPr>
-          <a:xfrm>
-            <a:off x="7059168" y="589788"/>
-            <a:ext cx="1399032" cy="237744"/>
-          </a:xfrm>
-          <a:prstGeom prst="rect">
-            <a:avLst/>
-          </a:prstGeom>
-          <a:noFill/>
-        </p:spPr>
-        <p:txBody>
-          <a:bodyPr wrap="square" lIns="0" rIns="0" tIns="0" bIns="0" anchor="t">
-            <a:spAutoFit/>
-          </a:bodyPr>
-          <a:lstStyle/>
-          <a:p>
-            <a:pPr algn="ctr">
-              <a:lnSpc>
-                <a:spcPct val="125000"/>
-              </a:lnSpc>
-              <a:spcAft>
-                <a:spcPts val="0"/>
-              </a:spcAft>
-            </a:pPr>
-            <a:r>
-              <a:rPr sz="1000" b="1" i="0" spc="100">
-                <a:solidFill>
-                  <a:srgbClr val="8A6512"/>
-                </a:solidFill>
-                <a:latin typeface="Karla"/>
-              </a:rPr>
-              <a:t>FEEDBACK</a:t>
             </a:r>
           </a:p>
         </p:txBody>
@@ -16245,21 +15101,21 @@
               </a:spcAft>
             </a:pPr>
             <a:r>
-              <a:rPr sz="3200" b="1" i="0">
+              <a:rPr sz="3200" b="0" i="0">
                 <a:solidFill>
                   <a:srgbClr val="3A3320"/>
                 </a:solidFill>
-                <a:latin typeface="Libre Caslon Display"/>
+                <a:latin typeface="Georgia"/>
               </a:rPr>
               <a:t>Nobody said: “I was sitting doing</a:t>
             </a:r>
             <a:br/>
             <a:r>
-              <a:rPr sz="3200" b="1" i="0">
+              <a:rPr sz="3200" b="0" i="0">
                 <a:solidFill>
                   <a:srgbClr val="3A3320"/>
                 </a:solidFill>
-                <a:latin typeface="Libre Caslon Display"/>
+                <a:latin typeface="Georgia"/>
               </a:rPr>
               <a:t>nothing, and it turned up.”</a:t>
             </a:r>
@@ -16345,7 +15201,7 @@
                 <a:solidFill>
                   <a:srgbClr val="4A4028"/>
                 </a:solidFill>
-                <a:latin typeface="Karla"/>
+                <a:latin typeface="Calibri"/>
               </a:rPr>
               <a:t>It turns up after you have started, not before.</a:t>
             </a:r>
@@ -16411,7 +15267,7 @@
                 <a:solidFill>
                   <a:srgbClr val="4A4028"/>
                 </a:solidFill>
-                <a:latin typeface="Karla"/>
+                <a:latin typeface="Calibri"/>
               </a:rPr>
               <a:t>The Pastoral Guide</a:t>
             </a:r>
@@ -16453,7 +15309,7 @@
                 <a:solidFill>
                   <a:srgbClr val="4A4028"/>
                 </a:solidFill>
-                <a:latin typeface="Karla"/>
+                <a:latin typeface="Calibri"/>
               </a:rPr>
               <a:t>6 / 20</a:t>
             </a:r>
@@ -16557,97 +15413,9 @@
                 <a:solidFill>
                   <a:srgbClr val="8A6512"/>
                 </a:solidFill>
-                <a:latin typeface="Karla"/>
+                <a:latin typeface="Calibri"/>
               </a:rPr>
               <a:t>THE THING ALMOST EVERYONE HAS BACKWARDS</a:t>
-            </a:r>
-          </a:p>
-        </p:txBody>
-      </p:sp>
-      <p:sp>
-        <p:nvSpPr>
-          <p:cNvPr id="4" name="Rounded Rectangle 3"/>
-          <p:cNvSpPr/>
-          <p:nvPr/>
-        </p:nvSpPr>
-        <p:spPr>
-          <a:xfrm>
-            <a:off x="7086600" y="530352"/>
-            <a:ext cx="1371600" cy="347472"/>
-          </a:xfrm>
-          <a:prstGeom prst="roundRect">
-            <a:avLst>
-              <a:gd name="adj" fmla="val 50000"/>
-            </a:avLst>
-          </a:prstGeom>
-          <a:solidFill>
-            <a:srgbClr val="FAF1DE"/>
-          </a:solidFill>
-          <a:ln>
-            <a:noFill/>
-          </a:ln>
-          <a:effectLst/>
-        </p:spPr>
-        <p:style>
-          <a:lnRef idx="1">
-            <a:schemeClr val="accent1"/>
-          </a:lnRef>
-          <a:fillRef idx="3">
-            <a:schemeClr val="accent1"/>
-          </a:fillRef>
-          <a:effectRef idx="2">
-            <a:schemeClr val="accent1"/>
-          </a:effectRef>
-          <a:fontRef idx="minor">
-            <a:schemeClr val="lt1"/>
-          </a:fontRef>
-        </p:style>
-        <p:txBody>
-          <a:bodyPr rtlCol="0" anchor="ctr"/>
-          <a:lstStyle/>
-          <a:p>
-            <a:pPr algn="ctr"/>
-          </a:p>
-        </p:txBody>
-      </p:sp>
-      <p:sp>
-        <p:nvSpPr>
-          <p:cNvPr id="5" name="TextBox 4"/>
-          <p:cNvSpPr txBox="1"/>
-          <p:nvPr/>
-        </p:nvSpPr>
-        <p:spPr>
-          <a:xfrm>
-            <a:off x="7086600" y="589788"/>
-            <a:ext cx="1371600" cy="237744"/>
-          </a:xfrm>
-          <a:prstGeom prst="rect">
-            <a:avLst/>
-          </a:prstGeom>
-          <a:noFill/>
-        </p:spPr>
-        <p:txBody>
-          <a:bodyPr wrap="square" lIns="0" rIns="0" tIns="0" bIns="0" anchor="t">
-            <a:spAutoFit/>
-          </a:bodyPr>
-          <a:lstStyle/>
-          <a:p>
-            <a:pPr algn="ctr">
-              <a:lnSpc>
-                <a:spcPct val="125000"/>
-              </a:lnSpc>
-              <a:spcAft>
-                <a:spcPts val="0"/>
-              </a:spcAft>
-            </a:pPr>
-            <a:r>
-              <a:rPr sz="1000" b="1" i="0" spc="100">
-                <a:solidFill>
-                  <a:srgbClr val="8A6512"/>
-                </a:solidFill>
-                <a:latin typeface="Karla"/>
-              </a:rPr>
-              <a:t>LEARN</a:t>
             </a:r>
           </a:p>
         </p:txBody>
@@ -16683,11 +15451,11 @@
               </a:spcAft>
             </a:pPr>
             <a:r>
-              <a:rPr sz="3200" b="1" i="0">
+              <a:rPr sz="3200" b="0" i="0">
                 <a:solidFill>
                   <a:srgbClr val="3F3826"/>
                 </a:solidFill>
-                <a:latin typeface="Libre Caslon Display"/>
+                <a:latin typeface="Georgia"/>
               </a:rPr>
               <a:t>Which way round is it?</a:t>
             </a:r>
@@ -16801,7 +15569,7 @@
                 <a:solidFill>
                   <a:srgbClr val="8A6512"/>
                 </a:solidFill>
-                <a:latin typeface="Karla"/>
+                <a:latin typeface="Calibri"/>
               </a:rPr>
               <a:t>HOW YOU THINK IT WORKS</a:t>
             </a:r>
@@ -16887,11 +15655,11 @@
               </a:spcAft>
             </a:pPr>
             <a:r>
-              <a:rPr sz="1250" b="1" i="0">
+              <a:rPr sz="1250" b="0" i="0">
                 <a:solidFill>
                   <a:srgbClr val="3F3826"/>
                 </a:solidFill>
-                <a:latin typeface="Libre Caslon Display"/>
+                <a:latin typeface="Georgia"/>
               </a:rPr>
               <a:t>Feel like it</a:t>
             </a:r>
@@ -16933,7 +15701,7 @@
                 <a:solidFill>
                   <a:srgbClr val="8A6512"/>
                 </a:solidFill>
-                <a:latin typeface="Karla"/>
+                <a:latin typeface="Calibri"/>
               </a:rPr>
               <a:t>→</a:t>
             </a:r>
@@ -17019,11 +15787,11 @@
               </a:spcAft>
             </a:pPr>
             <a:r>
-              <a:rPr sz="1250" b="1" i="0">
+              <a:rPr sz="1250" b="0" i="0">
                 <a:solidFill>
                   <a:srgbClr val="3F3826"/>
                 </a:solidFill>
-                <a:latin typeface="Libre Caslon Display"/>
+                <a:latin typeface="Georgia"/>
               </a:rPr>
               <a:t>Start</a:t>
             </a:r>
@@ -17065,7 +15833,7 @@
                 <a:solidFill>
                   <a:srgbClr val="8A6512"/>
                 </a:solidFill>
-                <a:latin typeface="Karla"/>
+                <a:latin typeface="Calibri"/>
               </a:rPr>
               <a:t>→</a:t>
             </a:r>
@@ -17151,11 +15919,11 @@
               </a:spcAft>
             </a:pPr>
             <a:r>
-              <a:rPr sz="1250" b="1" i="0">
+              <a:rPr sz="1250" b="0" i="0">
                 <a:solidFill>
                   <a:srgbClr val="3F3826"/>
                 </a:solidFill>
-                <a:latin typeface="Libre Caslon Display"/>
+                <a:latin typeface="Georgia"/>
               </a:rPr>
               <a:t>Keep going</a:t>
             </a:r>
@@ -17269,7 +16037,7 @@
                 <a:solidFill>
                   <a:srgbClr val="8A6512"/>
                 </a:solidFill>
-                <a:latin typeface="Karla"/>
+                <a:latin typeface="Calibri"/>
               </a:rPr>
               <a:t>HOW IT ACTUALLY WORKS</a:t>
             </a:r>
@@ -17355,11 +16123,11 @@
               </a:spcAft>
             </a:pPr>
             <a:r>
-              <a:rPr sz="1250" b="1" i="0">
+              <a:rPr sz="1250" b="0" i="0">
                 <a:solidFill>
                   <a:srgbClr val="3F3826"/>
                 </a:solidFill>
-                <a:latin typeface="Libre Caslon Display"/>
+                <a:latin typeface="Georgia"/>
               </a:rPr>
               <a:t>Start</a:t>
             </a:r>
@@ -17401,7 +16169,7 @@
                 <a:solidFill>
                   <a:srgbClr val="8A6512"/>
                 </a:solidFill>
-                <a:latin typeface="Karla"/>
+                <a:latin typeface="Calibri"/>
               </a:rPr>
               <a:t>→</a:t>
             </a:r>
@@ -17487,11 +16255,11 @@
               </a:spcAft>
             </a:pPr>
             <a:r>
-              <a:rPr sz="1250" b="1" i="0">
+              <a:rPr sz="1250" b="0" i="0">
                 <a:solidFill>
                   <a:srgbClr val="3F3826"/>
                 </a:solidFill>
-                <a:latin typeface="Libre Caslon Display"/>
+                <a:latin typeface="Georgia"/>
               </a:rPr>
               <a:t>Something moves</a:t>
             </a:r>
@@ -17533,7 +16301,7 @@
                 <a:solidFill>
                   <a:srgbClr val="8A6512"/>
                 </a:solidFill>
-                <a:latin typeface="Karla"/>
+                <a:latin typeface="Calibri"/>
               </a:rPr>
               <a:t>→</a:t>
             </a:r>
@@ -17619,11 +16387,11 @@
               </a:spcAft>
             </a:pPr>
             <a:r>
-              <a:rPr sz="1250" b="1" i="0">
+              <a:rPr sz="1250" b="0" i="0">
                 <a:solidFill>
                   <a:srgbClr val="3F3826"/>
                 </a:solidFill>
-                <a:latin typeface="Libre Caslon Display"/>
+                <a:latin typeface="Georgia"/>
               </a:rPr>
               <a:t>Feel like it</a:t>
             </a:r>
@@ -17665,7 +16433,7 @@
                 <a:solidFill>
                   <a:srgbClr val="8A6512"/>
                 </a:solidFill>
-                <a:latin typeface="Karla"/>
+                <a:latin typeface="Calibri"/>
               </a:rPr>
               <a:t>You are waiting at the wrong end of the arrow.</a:t>
             </a:r>
@@ -17731,7 +16499,7 @@
                 <a:solidFill>
                   <a:srgbClr val="A29A80"/>
                 </a:solidFill>
-                <a:latin typeface="Karla"/>
+                <a:latin typeface="Calibri"/>
               </a:rPr>
               <a:t>The Pastoral Guide</a:t>
             </a:r>
@@ -17773,7 +16541,7 @@
                 <a:solidFill>
                   <a:srgbClr val="A29A80"/>
                 </a:solidFill>
-                <a:latin typeface="Karla"/>
+                <a:latin typeface="Calibri"/>
               </a:rPr>
               <a:t>7 / 20</a:t>
             </a:r>
@@ -17877,97 +16645,9 @@
                 <a:solidFill>
                   <a:srgbClr val="4A4028"/>
                 </a:solidFill>
-                <a:latin typeface="Karla"/>
+                <a:latin typeface="Calibri"/>
               </a:rPr>
               <a:t>NOBODY IS MARKING THIS BIT</a:t>
-            </a:r>
-          </a:p>
-        </p:txBody>
-      </p:sp>
-      <p:sp>
-        <p:nvSpPr>
-          <p:cNvPr id="4" name="Rounded Rectangle 3"/>
-          <p:cNvSpPr/>
-          <p:nvPr/>
-        </p:nvSpPr>
-        <p:spPr>
-          <a:xfrm>
-            <a:off x="6986016" y="530352"/>
-            <a:ext cx="1472184" cy="347472"/>
-          </a:xfrm>
-          <a:prstGeom prst="roundRect">
-            <a:avLst>
-              <a:gd name="adj" fmla="val 50000"/>
-            </a:avLst>
-          </a:prstGeom>
-          <a:solidFill>
-            <a:srgbClr val="FFFFFF"/>
-          </a:solidFill>
-          <a:ln>
-            <a:noFill/>
-          </a:ln>
-          <a:effectLst/>
-        </p:spPr>
-        <p:style>
-          <a:lnRef idx="1">
-            <a:schemeClr val="accent1"/>
-          </a:lnRef>
-          <a:fillRef idx="3">
-            <a:schemeClr val="accent1"/>
-          </a:fillRef>
-          <a:effectRef idx="2">
-            <a:schemeClr val="accent1"/>
-          </a:effectRef>
-          <a:fontRef idx="minor">
-            <a:schemeClr val="lt1"/>
-          </a:fontRef>
-        </p:style>
-        <p:txBody>
-          <a:bodyPr rtlCol="0" anchor="ctr"/>
-          <a:lstStyle/>
-          <a:p>
-            <a:pPr algn="ctr"/>
-          </a:p>
-        </p:txBody>
-      </p:sp>
-      <p:sp>
-        <p:nvSpPr>
-          <p:cNvPr id="5" name="TextBox 4"/>
-          <p:cNvSpPr txBox="1"/>
-          <p:nvPr/>
-        </p:nvSpPr>
-        <p:spPr>
-          <a:xfrm>
-            <a:off x="6986016" y="589788"/>
-            <a:ext cx="1472184" cy="237744"/>
-          </a:xfrm>
-          <a:prstGeom prst="rect">
-            <a:avLst/>
-          </a:prstGeom>
-          <a:noFill/>
-        </p:spPr>
-        <p:txBody>
-          <a:bodyPr wrap="square" lIns="0" rIns="0" tIns="0" bIns="0" anchor="t">
-            <a:spAutoFit/>
-          </a:bodyPr>
-          <a:lstStyle/>
-          <a:p>
-            <a:pPr algn="ctr">
-              <a:lnSpc>
-                <a:spcPct val="125000"/>
-              </a:lnSpc>
-              <a:spcAft>
-                <a:spcPts val="0"/>
-              </a:spcAft>
-            </a:pPr>
-            <a:r>
-              <a:rPr sz="1000" b="1" i="0" spc="100">
-                <a:solidFill>
-                  <a:srgbClr val="8A6512"/>
-                </a:solidFill>
-                <a:latin typeface="Karla"/>
-              </a:rPr>
-              <a:t>BE HONEST</a:t>
             </a:r>
           </a:p>
         </p:txBody>
@@ -18003,11 +16683,11 @@
               </a:spcAft>
             </a:pPr>
             <a:r>
-              <a:rPr sz="3200" b="1" i="0">
+              <a:rPr sz="3200" b="0" i="0">
                 <a:solidFill>
                   <a:srgbClr val="3A3320"/>
                 </a:solidFill>
-                <a:latin typeface="Libre Caslon Display"/>
+                <a:latin typeface="Georgia"/>
               </a:rPr>
               <a:t>You already know this feeling</a:t>
             </a:r>
@@ -18097,7 +16777,7 @@
                 <a:solidFill>
                   <a:srgbClr val="8A6512"/>
                 </a:solidFill>
-                <a:latin typeface="Karla"/>
+                <a:latin typeface="Calibri"/>
               </a:rPr>
               <a:t>You have been about to start for two hours.</a:t>
             </a:r>
@@ -18187,7 +16867,7 @@
                 <a:solidFill>
                   <a:srgbClr val="8A6512"/>
                 </a:solidFill>
-                <a:latin typeface="Karla"/>
+                <a:latin typeface="Calibri"/>
               </a:rPr>
               <a:t>You are not even enjoying not doing it.</a:t>
             </a:r>
@@ -18277,7 +16957,7 @@
                 <a:solidFill>
                   <a:srgbClr val="8A6512"/>
                 </a:solidFill>
-                <a:latin typeface="Karla"/>
+                <a:latin typeface="Calibri"/>
               </a:rPr>
               <a:t>The thing you are avoiding would take about eleven minutes.</a:t>
             </a:r>
@@ -18319,7 +16999,7 @@
                 <a:solidFill>
                   <a:srgbClr val="3A3320"/>
                 </a:solidFill>
-                <a:latin typeface="Karla"/>
+                <a:latin typeface="Calibri"/>
               </a:rPr>
               <a:t>Avoiding something is nearly always more work than doing it.</a:t>
             </a:r>
@@ -18385,7 +17065,7 @@
                 <a:solidFill>
                   <a:srgbClr val="4A4028"/>
                 </a:solidFill>
-                <a:latin typeface="Karla"/>
+                <a:latin typeface="Calibri"/>
               </a:rPr>
               <a:t>The Pastoral Guide</a:t>
             </a:r>
@@ -18427,7 +17107,7 @@
                 <a:solidFill>
                   <a:srgbClr val="4A4028"/>
                 </a:solidFill>
-                <a:latin typeface="Karla"/>
+                <a:latin typeface="Calibri"/>
               </a:rPr>
               <a:t>8 / 20</a:t>
             </a:r>
@@ -18531,97 +17211,9 @@
                 <a:solidFill>
                   <a:srgbClr val="8A6512"/>
                 </a:solidFill>
-                <a:latin typeface="Karla"/>
+                <a:latin typeface="Calibri"/>
               </a:rPr>
               <a:t>WATCH ME DO ONE</a:t>
-            </a:r>
-          </a:p>
-        </p:txBody>
-      </p:sp>
-      <p:sp>
-        <p:nvSpPr>
-          <p:cNvPr id="4" name="Rounded Rectangle 3"/>
-          <p:cNvSpPr/>
-          <p:nvPr/>
-        </p:nvSpPr>
-        <p:spPr>
-          <a:xfrm>
-            <a:off x="7086600" y="530352"/>
-            <a:ext cx="1371600" cy="347472"/>
-          </a:xfrm>
-          <a:prstGeom prst="roundRect">
-            <a:avLst>
-              <a:gd name="adj" fmla="val 50000"/>
-            </a:avLst>
-          </a:prstGeom>
-          <a:solidFill>
-            <a:srgbClr val="FAF1DE"/>
-          </a:solidFill>
-          <a:ln>
-            <a:noFill/>
-          </a:ln>
-          <a:effectLst/>
-        </p:spPr>
-        <p:style>
-          <a:lnRef idx="1">
-            <a:schemeClr val="accent1"/>
-          </a:lnRef>
-          <a:fillRef idx="3">
-            <a:schemeClr val="accent1"/>
-          </a:fillRef>
-          <a:effectRef idx="2">
-            <a:schemeClr val="accent1"/>
-          </a:effectRef>
-          <a:fontRef idx="minor">
-            <a:schemeClr val="lt1"/>
-          </a:fontRef>
-        </p:style>
-        <p:txBody>
-          <a:bodyPr rtlCol="0" anchor="ctr"/>
-          <a:lstStyle/>
-          <a:p>
-            <a:pPr algn="ctr"/>
-          </a:p>
-        </p:txBody>
-      </p:sp>
-      <p:sp>
-        <p:nvSpPr>
-          <p:cNvPr id="5" name="TextBox 4"/>
-          <p:cNvSpPr txBox="1"/>
-          <p:nvPr/>
-        </p:nvSpPr>
-        <p:spPr>
-          <a:xfrm>
-            <a:off x="7086600" y="589788"/>
-            <a:ext cx="1371600" cy="237744"/>
-          </a:xfrm>
-          <a:prstGeom prst="rect">
-            <a:avLst/>
-          </a:prstGeom>
-          <a:noFill/>
-        </p:spPr>
-        <p:txBody>
-          <a:bodyPr wrap="square" lIns="0" rIns="0" tIns="0" bIns="0" anchor="t">
-            <a:spAutoFit/>
-          </a:bodyPr>
-          <a:lstStyle/>
-          <a:p>
-            <a:pPr algn="ctr">
-              <a:lnSpc>
-                <a:spcPct val="125000"/>
-              </a:lnSpc>
-              <a:spcAft>
-                <a:spcPts val="0"/>
-              </a:spcAft>
-            </a:pPr>
-            <a:r>
-              <a:rPr sz="1000" b="1" i="0" spc="100">
-                <a:solidFill>
-                  <a:srgbClr val="8A6512"/>
-                </a:solidFill>
-                <a:latin typeface="Karla"/>
-              </a:rPr>
-              <a:t>MODEL</a:t>
             </a:r>
           </a:p>
         </p:txBody>
@@ -18657,11 +17249,11 @@
               </a:spcAft>
             </a:pPr>
             <a:r>
-              <a:rPr sz="3200" b="1" i="0">
+              <a:rPr sz="3200" b="0" i="0">
                 <a:solidFill>
                   <a:srgbClr val="3F3826"/>
                 </a:solidFill>
-                <a:latin typeface="Libre Caslon Display"/>
+                <a:latin typeface="Georgia"/>
               </a:rPr>
               <a:t>Shrink it until it is silly</a:t>
             </a:r>
@@ -18703,7 +17295,7 @@
                 <a:solidFill>
                   <a:srgbClr val="706750"/>
                 </a:solidFill>
-                <a:latin typeface="Karla"/>
+                <a:latin typeface="Calibri"/>
               </a:rPr>
               <a:t>Keep cutting the task in half out loud until nobody in the room could refuse it.</a:t>
             </a:r>
@@ -18789,11 +17381,11 @@
               </a:spcAft>
             </a:pPr>
             <a:r>
-              <a:rPr sz="1350" b="1" i="0">
+              <a:rPr sz="1350" b="0" i="0">
                 <a:solidFill>
                   <a:srgbClr val="3F3826"/>
                 </a:solidFill>
-                <a:latin typeface="Libre Caslon Display"/>
+                <a:latin typeface="Georgia"/>
               </a:rPr>
               <a:t>Revise for the geography test</a:t>
             </a:r>
@@ -18835,7 +17427,7 @@
                 <a:solidFill>
                   <a:srgbClr val="706750"/>
                 </a:solidFill>
-                <a:latin typeface="Karla"/>
+                <a:latin typeface="Calibri"/>
               </a:rPr>
               <a:t>Too big. You will not start this.</a:t>
             </a:r>
@@ -18921,11 +17513,11 @@
               </a:spcAft>
             </a:pPr>
             <a:r>
-              <a:rPr sz="1350" b="1" i="0">
+              <a:rPr sz="1350" b="0" i="0">
                 <a:solidFill>
                   <a:srgbClr val="3F3826"/>
                 </a:solidFill>
-                <a:latin typeface="Libre Caslon Display"/>
+                <a:latin typeface="Georgia"/>
               </a:rPr>
               <a:t>Do one page of geography</a:t>
             </a:r>
@@ -18967,7 +17559,7 @@
                 <a:solidFill>
                   <a:srgbClr val="706750"/>
                 </a:solidFill>
-                <a:latin typeface="Karla"/>
+                <a:latin typeface="Calibri"/>
               </a:rPr>
               <a:t>Still big enough to put off.</a:t>
             </a:r>
@@ -19053,11 +17645,11 @@
               </a:spcAft>
             </a:pPr>
             <a:r>
-              <a:rPr sz="1350" b="1" i="0">
+              <a:rPr sz="1350" b="0" i="0">
                 <a:solidFill>
                   <a:srgbClr val="3F3826"/>
                 </a:solidFill>
-                <a:latin typeface="Libre Caslon Display"/>
+                <a:latin typeface="Georgia"/>
               </a:rPr>
               <a:t>Read one page of the booklet</a:t>
             </a:r>
@@ -19099,7 +17691,7 @@
                 <a:solidFill>
                   <a:srgbClr val="706750"/>
                 </a:solidFill>
-                <a:latin typeface="Karla"/>
+                <a:latin typeface="Calibri"/>
               </a:rPr>
               <a:t>Getting there.</a:t>
             </a:r>
@@ -19185,11 +17777,11 @@
               </a:spcAft>
             </a:pPr>
             <a:r>
-              <a:rPr sz="1350" b="1" i="0">
+              <a:rPr sz="1350" b="0" i="0">
                 <a:solidFill>
                   <a:srgbClr val="8A6512"/>
                 </a:solidFill>
-                <a:latin typeface="Libre Caslon Display"/>
+                <a:latin typeface="Georgia"/>
               </a:rPr>
               <a:t>Open the booklet</a:t>
             </a:r>
@@ -19231,7 +17823,7 @@
                 <a:solidFill>
                   <a:srgbClr val="706750"/>
                 </a:solidFill>
-                <a:latin typeface="Karla"/>
+                <a:latin typeface="Calibri"/>
               </a:rPr>
               <a:t>This one you will actually do.</a:t>
             </a:r>
@@ -19297,7 +17889,7 @@
                 <a:solidFill>
                   <a:srgbClr val="A29A80"/>
                 </a:solidFill>
-                <a:latin typeface="Karla"/>
+                <a:latin typeface="Calibri"/>
               </a:rPr>
               <a:t>The Pastoral Guide</a:t>
             </a:r>
@@ -19339,7 +17931,7 @@
                 <a:solidFill>
                   <a:srgbClr val="A29A80"/>
                 </a:solidFill>
-                <a:latin typeface="Karla"/>
+                <a:latin typeface="Calibri"/>
               </a:rPr>
               <a:t>9 / 20</a:t>
             </a:r>

--- a/tutor-time/motivation-comes-second/downloads/Motivation_Comes_Second.pptx
+++ b/tutor-time/motivation-comes-second/downloads/Motivation_Comes_Second.pptx
@@ -3298,7 +3298,7 @@
                 </a:solidFill>
                 <a:latin typeface="Calibri"/>
               </a:rPr>
-              <a:t>You do not start because you feel like it. You feel like it because you started.</a:t>
+              <a:t>Why starting usually comes before feeling like it.</a:t>
             </a:r>
           </a:p>
         </p:txBody>
